--- a/CHL5250PosterParkinsons new.pptx
+++ b/CHL5250PosterParkinsons new.pptx
@@ -5,10 +5,10 @@
     <p:sldMasterId id="2147483648" r:id="rId1"/>
   </p:sldMasterIdLst>
   <p:notesMasterIdLst>
-    <p:notesMasterId r:id="rId4"/>
+    <p:notesMasterId r:id="rId3"/>
   </p:notesMasterIdLst>
   <p:sldIdLst>
-    <p:sldId id="256" r:id="rId3"/>
+    <p:sldId id="256" r:id="rId2"/>
   </p:sldIdLst>
   <p:sldSz cx="32918400" cy="32918400"/>
   <p:notesSz cx="6858000" cy="9144000"/>
@@ -107,6 +107,11 @@
       </a:defRPr>
     </a:lvl9pPr>
   </p:defaultTextStyle>
+  <p:extLst>
+    <p:ext uri="{EFAFB233-063F-42B5-8137-9DF3F51BA10A}">
+      <p15:sldGuideLst xmlns:p15="http://schemas.microsoft.com/office/powerpoint/2012/main"/>
+    </p:ext>
+  </p:extLst>
 </p:presentation>
 </file>
 
@@ -192,6 +197,7 @@
           <a:p>
             <a:fld id="{D2A48B96-639E-45A3-A0BA-2464DFDB1FAA}" type="datetimeFigureOut">
               <a:rPr lang="zh-CN" altLang="en-US" smtClean="0"/>
+              <a:t>2026/4/12</a:t>
             </a:fld>
             <a:endParaRPr lang="zh-CN" altLang="en-US"/>
           </a:p>
@@ -255,42 +261,37 @@
           <a:p>
             <a:pPr lvl="0"/>
             <a:r>
-              <a:rPr lang="zh-CN" altLang="en-US" smtClean="0"/>
+              <a:rPr lang="zh-CN" altLang="en-US"/>
               <a:t>单击此处编辑母版文本样式</a:t>
             </a:r>
-            <a:endParaRPr lang="zh-CN" altLang="en-US" smtClean="0"/>
           </a:p>
           <a:p>
             <a:pPr lvl="1"/>
             <a:r>
-              <a:rPr lang="zh-CN" altLang="en-US" smtClean="0"/>
+              <a:rPr lang="zh-CN" altLang="en-US"/>
               <a:t>第二级</a:t>
             </a:r>
-            <a:endParaRPr lang="zh-CN" altLang="en-US" smtClean="0"/>
           </a:p>
           <a:p>
             <a:pPr lvl="2"/>
             <a:r>
-              <a:rPr lang="zh-CN" altLang="en-US" smtClean="0"/>
+              <a:rPr lang="zh-CN" altLang="en-US"/>
               <a:t>第三级</a:t>
             </a:r>
-            <a:endParaRPr lang="zh-CN" altLang="en-US" smtClean="0"/>
           </a:p>
           <a:p>
             <a:pPr lvl="3"/>
             <a:r>
-              <a:rPr lang="zh-CN" altLang="en-US" smtClean="0"/>
+              <a:rPr lang="zh-CN" altLang="en-US"/>
               <a:t>第四级</a:t>
             </a:r>
-            <a:endParaRPr lang="zh-CN" altLang="en-US" smtClean="0"/>
           </a:p>
           <a:p>
             <a:pPr lvl="4"/>
             <a:r>
-              <a:rPr lang="zh-CN" altLang="en-US" smtClean="0"/>
+              <a:rPr lang="zh-CN" altLang="en-US"/>
               <a:t>第五级</a:t>
             </a:r>
-            <a:endParaRPr lang="zh-CN" altLang="en-US"/>
           </a:p>
         </p:txBody>
       </p:sp>
@@ -354,6 +355,7 @@
           <a:p>
             <a:fld id="{A6837353-30EB-4A48-80EB-173D804AEFBD}" type="slidenum">
               <a:rPr lang="zh-CN" altLang="en-US" smtClean="0"/>
+              <a:t>‹#›</a:t>
             </a:fld>
             <a:endParaRPr lang="zh-CN" altLang="en-US"/>
           </a:p>
@@ -466,12 +468,19 @@
         <p:cNvGrpSpPr/>
         <p:nvPr/>
       </p:nvGrpSpPr>
-      <p:grpSpPr/>
+      <p:grpSpPr>
+        <a:xfrm>
+          <a:off x="0" y="0"/>
+          <a:ext cx="0" cy="0"/>
+          <a:chOff x="0" y="0"/>
+          <a:chExt cx="0" cy="0"/>
+        </a:xfrm>
+      </p:grpSpPr>
       <p:sp>
         <p:nvSpPr>
           <p:cNvPr id="2" name="幻灯片图像占位符 1"/>
           <p:cNvSpPr>
-            <a:spLocks noGrp="1"/>
+            <a:spLocks noGrp="1" noRot="1" noChangeAspect="1"/>
           </p:cNvSpPr>
           <p:nvPr>
             <p:ph type="sldImg" idx="2"/>
@@ -492,6 +501,7 @@
         <p:spPr/>
         <p:txBody>
           <a:bodyPr/>
+          <a:lstStyle/>
           <a:p>
             <a:endParaRPr lang="zh-CN" altLang="en-US"/>
           </a:p>
@@ -636,6 +646,7 @@
           <a:p>
             <a:fld id="{B17E097D-BF14-0048-A1F1-91A4B3DB23CE}" type="datetimeFigureOut">
               <a:rPr lang="en-US" smtClean="0"/>
+              <a:t>4/12/26</a:t>
             </a:fld>
             <a:endParaRPr lang="en-US"/>
           </a:p>
@@ -677,6 +688,7 @@
           <a:p>
             <a:fld id="{2F29E7E3-3D05-DC41-B909-139336B5BB98}" type="slidenum">
               <a:rPr lang="en-US" smtClean="0"/>
+              <a:t>‹#›</a:t>
             </a:fld>
             <a:endParaRPr lang="en-US"/>
           </a:p>
@@ -750,7 +762,6 @@
               <a:rPr lang="en-US"/>
               <a:t>Click to edit Master text styles</a:t>
             </a:r>
-            <a:endParaRPr lang="en-US"/>
           </a:p>
           <a:p>
             <a:pPr lvl="1"/>
@@ -758,7 +769,6 @@
               <a:rPr lang="en-US"/>
               <a:t>Second level</a:t>
             </a:r>
-            <a:endParaRPr lang="en-US"/>
           </a:p>
           <a:p>
             <a:pPr lvl="2"/>
@@ -766,7 +776,6 @@
               <a:rPr lang="en-US"/>
               <a:t>Third level</a:t>
             </a:r>
-            <a:endParaRPr lang="en-US"/>
           </a:p>
           <a:p>
             <a:pPr lvl="3"/>
@@ -774,7 +783,6 @@
               <a:rPr lang="en-US"/>
               <a:t>Fourth level</a:t>
             </a:r>
-            <a:endParaRPr lang="en-US"/>
           </a:p>
           <a:p>
             <a:pPr lvl="4"/>
@@ -803,6 +811,7 @@
           <a:p>
             <a:fld id="{B17E097D-BF14-0048-A1F1-91A4B3DB23CE}" type="datetimeFigureOut">
               <a:rPr lang="en-US" smtClean="0"/>
+              <a:t>4/12/26</a:t>
             </a:fld>
             <a:endParaRPr lang="en-US"/>
           </a:p>
@@ -844,6 +853,7 @@
           <a:p>
             <a:fld id="{2F29E7E3-3D05-DC41-B909-139336B5BB98}" type="slidenum">
               <a:rPr lang="en-US" smtClean="0"/>
+              <a:t>‹#›</a:t>
             </a:fld>
             <a:endParaRPr lang="en-US"/>
           </a:p>
@@ -927,7 +937,6 @@
               <a:rPr lang="en-US"/>
               <a:t>Click to edit Master text styles</a:t>
             </a:r>
-            <a:endParaRPr lang="en-US"/>
           </a:p>
           <a:p>
             <a:pPr lvl="1"/>
@@ -935,7 +944,6 @@
               <a:rPr lang="en-US"/>
               <a:t>Second level</a:t>
             </a:r>
-            <a:endParaRPr lang="en-US"/>
           </a:p>
           <a:p>
             <a:pPr lvl="2"/>
@@ -943,7 +951,6 @@
               <a:rPr lang="en-US"/>
               <a:t>Third level</a:t>
             </a:r>
-            <a:endParaRPr lang="en-US"/>
           </a:p>
           <a:p>
             <a:pPr lvl="3"/>
@@ -951,7 +958,6 @@
               <a:rPr lang="en-US"/>
               <a:t>Fourth level</a:t>
             </a:r>
-            <a:endParaRPr lang="en-US"/>
           </a:p>
           <a:p>
             <a:pPr lvl="4"/>
@@ -980,6 +986,7 @@
           <a:p>
             <a:fld id="{B17E097D-BF14-0048-A1F1-91A4B3DB23CE}" type="datetimeFigureOut">
               <a:rPr lang="en-US" smtClean="0"/>
+              <a:t>4/12/26</a:t>
             </a:fld>
             <a:endParaRPr lang="en-US"/>
           </a:p>
@@ -1021,6 +1028,7 @@
           <a:p>
             <a:fld id="{2F29E7E3-3D05-DC41-B909-139336B5BB98}" type="slidenum">
               <a:rPr lang="en-US" smtClean="0"/>
+              <a:t>‹#›</a:t>
             </a:fld>
             <a:endParaRPr lang="en-US"/>
           </a:p>
@@ -1094,7 +1102,6 @@
               <a:rPr lang="en-US"/>
               <a:t>Click to edit Master text styles</a:t>
             </a:r>
-            <a:endParaRPr lang="en-US"/>
           </a:p>
           <a:p>
             <a:pPr lvl="1"/>
@@ -1102,7 +1109,6 @@
               <a:rPr lang="en-US"/>
               <a:t>Second level</a:t>
             </a:r>
-            <a:endParaRPr lang="en-US"/>
           </a:p>
           <a:p>
             <a:pPr lvl="2"/>
@@ -1110,7 +1116,6 @@
               <a:rPr lang="en-US"/>
               <a:t>Third level</a:t>
             </a:r>
-            <a:endParaRPr lang="en-US"/>
           </a:p>
           <a:p>
             <a:pPr lvl="3"/>
@@ -1118,7 +1123,6 @@
               <a:rPr lang="en-US"/>
               <a:t>Fourth level</a:t>
             </a:r>
-            <a:endParaRPr lang="en-US"/>
           </a:p>
           <a:p>
             <a:pPr lvl="4"/>
@@ -1147,6 +1151,7 @@
           <a:p>
             <a:fld id="{B17E097D-BF14-0048-A1F1-91A4B3DB23CE}" type="datetimeFigureOut">
               <a:rPr lang="en-US" smtClean="0"/>
+              <a:t>4/12/26</a:t>
             </a:fld>
             <a:endParaRPr lang="en-US"/>
           </a:p>
@@ -1188,6 +1193,7 @@
           <a:p>
             <a:fld id="{2F29E7E3-3D05-DC41-B909-139336B5BB98}" type="slidenum">
               <a:rPr lang="en-US" smtClean="0"/>
+              <a:t>‹#›</a:t>
             </a:fld>
             <a:endParaRPr lang="en-US"/>
           </a:p>
@@ -1366,7 +1372,6 @@
               <a:rPr lang="en-US"/>
               <a:t>Click to edit Master text styles</a:t>
             </a:r>
-            <a:endParaRPr lang="en-US"/>
           </a:p>
         </p:txBody>
       </p:sp>
@@ -1387,6 +1392,7 @@
           <a:p>
             <a:fld id="{B17E097D-BF14-0048-A1F1-91A4B3DB23CE}" type="datetimeFigureOut">
               <a:rPr lang="en-US" smtClean="0"/>
+              <a:t>4/12/26</a:t>
             </a:fld>
             <a:endParaRPr lang="en-US"/>
           </a:p>
@@ -1428,6 +1434,7 @@
           <a:p>
             <a:fld id="{2F29E7E3-3D05-DC41-B909-139336B5BB98}" type="slidenum">
               <a:rPr lang="en-US" smtClean="0"/>
+              <a:t>‹#›</a:t>
             </a:fld>
             <a:endParaRPr lang="en-US"/>
           </a:p>
@@ -1506,7 +1513,6 @@
               <a:rPr lang="en-US"/>
               <a:t>Click to edit Master text styles</a:t>
             </a:r>
-            <a:endParaRPr lang="en-US"/>
           </a:p>
           <a:p>
             <a:pPr lvl="1"/>
@@ -1514,7 +1520,6 @@
               <a:rPr lang="en-US"/>
               <a:t>Second level</a:t>
             </a:r>
-            <a:endParaRPr lang="en-US"/>
           </a:p>
           <a:p>
             <a:pPr lvl="2"/>
@@ -1522,7 +1527,6 @@
               <a:rPr lang="en-US"/>
               <a:t>Third level</a:t>
             </a:r>
-            <a:endParaRPr lang="en-US"/>
           </a:p>
           <a:p>
             <a:pPr lvl="3"/>
@@ -1530,7 +1534,6 @@
               <a:rPr lang="en-US"/>
               <a:t>Fourth level</a:t>
             </a:r>
-            <a:endParaRPr lang="en-US"/>
           </a:p>
           <a:p>
             <a:pPr lvl="4"/>
@@ -1567,7 +1570,6 @@
               <a:rPr lang="en-US"/>
               <a:t>Click to edit Master text styles</a:t>
             </a:r>
-            <a:endParaRPr lang="en-US"/>
           </a:p>
           <a:p>
             <a:pPr lvl="1"/>
@@ -1575,7 +1577,6 @@
               <a:rPr lang="en-US"/>
               <a:t>Second level</a:t>
             </a:r>
-            <a:endParaRPr lang="en-US"/>
           </a:p>
           <a:p>
             <a:pPr lvl="2"/>
@@ -1583,7 +1584,6 @@
               <a:rPr lang="en-US"/>
               <a:t>Third level</a:t>
             </a:r>
-            <a:endParaRPr lang="en-US"/>
           </a:p>
           <a:p>
             <a:pPr lvl="3"/>
@@ -1591,7 +1591,6 @@
               <a:rPr lang="en-US"/>
               <a:t>Fourth level</a:t>
             </a:r>
-            <a:endParaRPr lang="en-US"/>
           </a:p>
           <a:p>
             <a:pPr lvl="4"/>
@@ -1620,6 +1619,7 @@
           <a:p>
             <a:fld id="{B17E097D-BF14-0048-A1F1-91A4B3DB23CE}" type="datetimeFigureOut">
               <a:rPr lang="en-US" smtClean="0"/>
+              <a:t>4/12/26</a:t>
             </a:fld>
             <a:endParaRPr lang="en-US"/>
           </a:p>
@@ -1661,6 +1661,7 @@
           <a:p>
             <a:fld id="{2F29E7E3-3D05-DC41-B909-139336B5BB98}" type="slidenum">
               <a:rPr lang="en-US" smtClean="0"/>
+              <a:t>‹#›</a:t>
             </a:fld>
             <a:endParaRPr lang="en-US"/>
           </a:p>
@@ -1781,7 +1782,6 @@
               <a:rPr lang="en-US"/>
               <a:t>Click to edit Master text styles</a:t>
             </a:r>
-            <a:endParaRPr lang="en-US"/>
           </a:p>
         </p:txBody>
       </p:sp>
@@ -1810,7 +1810,6 @@
               <a:rPr lang="en-US"/>
               <a:t>Click to edit Master text styles</a:t>
             </a:r>
-            <a:endParaRPr lang="en-US"/>
           </a:p>
           <a:p>
             <a:pPr lvl="1"/>
@@ -1818,7 +1817,6 @@
               <a:rPr lang="en-US"/>
               <a:t>Second level</a:t>
             </a:r>
-            <a:endParaRPr lang="en-US"/>
           </a:p>
           <a:p>
             <a:pPr lvl="2"/>
@@ -1826,7 +1824,6 @@
               <a:rPr lang="en-US"/>
               <a:t>Third level</a:t>
             </a:r>
-            <a:endParaRPr lang="en-US"/>
           </a:p>
           <a:p>
             <a:pPr lvl="3"/>
@@ -1834,7 +1831,6 @@
               <a:rPr lang="en-US"/>
               <a:t>Fourth level</a:t>
             </a:r>
-            <a:endParaRPr lang="en-US"/>
           </a:p>
           <a:p>
             <a:pPr lvl="4"/>
@@ -1908,7 +1904,6 @@
               <a:rPr lang="en-US"/>
               <a:t>Click to edit Master text styles</a:t>
             </a:r>
-            <a:endParaRPr lang="en-US"/>
           </a:p>
         </p:txBody>
       </p:sp>
@@ -1937,7 +1932,6 @@
               <a:rPr lang="en-US"/>
               <a:t>Click to edit Master text styles</a:t>
             </a:r>
-            <a:endParaRPr lang="en-US"/>
           </a:p>
           <a:p>
             <a:pPr lvl="1"/>
@@ -1945,7 +1939,6 @@
               <a:rPr lang="en-US"/>
               <a:t>Second level</a:t>
             </a:r>
-            <a:endParaRPr lang="en-US"/>
           </a:p>
           <a:p>
             <a:pPr lvl="2"/>
@@ -1953,7 +1946,6 @@
               <a:rPr lang="en-US"/>
               <a:t>Third level</a:t>
             </a:r>
-            <a:endParaRPr lang="en-US"/>
           </a:p>
           <a:p>
             <a:pPr lvl="3"/>
@@ -1961,7 +1953,6 @@
               <a:rPr lang="en-US"/>
               <a:t>Fourth level</a:t>
             </a:r>
-            <a:endParaRPr lang="en-US"/>
           </a:p>
           <a:p>
             <a:pPr lvl="4"/>
@@ -1990,6 +1981,7 @@
           <a:p>
             <a:fld id="{B17E097D-BF14-0048-A1F1-91A4B3DB23CE}" type="datetimeFigureOut">
               <a:rPr lang="en-US" smtClean="0"/>
+              <a:t>4/12/26</a:t>
             </a:fld>
             <a:endParaRPr lang="en-US"/>
           </a:p>
@@ -2031,6 +2023,7 @@
           <a:p>
             <a:fld id="{2F29E7E3-3D05-DC41-B909-139336B5BB98}" type="slidenum">
               <a:rPr lang="en-US" smtClean="0"/>
+              <a:t>‹#›</a:t>
             </a:fld>
             <a:endParaRPr lang="en-US"/>
           </a:p>
@@ -2101,6 +2094,7 @@
           <a:p>
             <a:fld id="{B17E097D-BF14-0048-A1F1-91A4B3DB23CE}" type="datetimeFigureOut">
               <a:rPr lang="en-US" smtClean="0"/>
+              <a:t>4/12/26</a:t>
             </a:fld>
             <a:endParaRPr lang="en-US"/>
           </a:p>
@@ -2142,6 +2136,7 @@
           <a:p>
             <a:fld id="{2F29E7E3-3D05-DC41-B909-139336B5BB98}" type="slidenum">
               <a:rPr lang="en-US" smtClean="0"/>
+              <a:t>‹#›</a:t>
             </a:fld>
             <a:endParaRPr lang="en-US"/>
           </a:p>
@@ -2189,6 +2184,7 @@
           <a:p>
             <a:fld id="{B17E097D-BF14-0048-A1F1-91A4B3DB23CE}" type="datetimeFigureOut">
               <a:rPr lang="en-US" smtClean="0"/>
+              <a:t>4/12/26</a:t>
             </a:fld>
             <a:endParaRPr lang="en-US"/>
           </a:p>
@@ -2230,6 +2226,7 @@
           <a:p>
             <a:fld id="{2F29E7E3-3D05-DC41-B909-139336B5BB98}" type="slidenum">
               <a:rPr lang="en-US" smtClean="0"/>
+              <a:t>‹#›</a:t>
             </a:fld>
             <a:endParaRPr lang="en-US"/>
           </a:p>
@@ -2345,7 +2342,6 @@
               <a:rPr lang="en-US"/>
               <a:t>Click to edit Master text styles</a:t>
             </a:r>
-            <a:endParaRPr lang="en-US"/>
           </a:p>
           <a:p>
             <a:pPr lvl="1"/>
@@ -2353,7 +2349,6 @@
               <a:rPr lang="en-US"/>
               <a:t>Second level</a:t>
             </a:r>
-            <a:endParaRPr lang="en-US"/>
           </a:p>
           <a:p>
             <a:pPr lvl="2"/>
@@ -2361,7 +2356,6 @@
               <a:rPr lang="en-US"/>
               <a:t>Third level</a:t>
             </a:r>
-            <a:endParaRPr lang="en-US"/>
           </a:p>
           <a:p>
             <a:pPr lvl="3"/>
@@ -2369,7 +2363,6 @@
               <a:rPr lang="en-US"/>
               <a:t>Fourth level</a:t>
             </a:r>
-            <a:endParaRPr lang="en-US"/>
           </a:p>
           <a:p>
             <a:pPr lvl="4"/>
@@ -2443,7 +2436,6 @@
               <a:rPr lang="en-US"/>
               <a:t>Click to edit Master text styles</a:t>
             </a:r>
-            <a:endParaRPr lang="en-US"/>
           </a:p>
         </p:txBody>
       </p:sp>
@@ -2464,6 +2456,7 @@
           <a:p>
             <a:fld id="{B17E097D-BF14-0048-A1F1-91A4B3DB23CE}" type="datetimeFigureOut">
               <a:rPr lang="en-US" smtClean="0"/>
+              <a:t>4/12/26</a:t>
             </a:fld>
             <a:endParaRPr lang="en-US"/>
           </a:p>
@@ -2505,6 +2498,7 @@
           <a:p>
             <a:fld id="{2F29E7E3-3D05-DC41-B909-139336B5BB98}" type="slidenum">
               <a:rPr lang="en-US" smtClean="0"/>
+              <a:t>‹#›</a:t>
             </a:fld>
             <a:endParaRPr lang="en-US"/>
           </a:p>
@@ -2694,7 +2688,6 @@
               <a:rPr lang="en-US"/>
               <a:t>Click to edit Master text styles</a:t>
             </a:r>
-            <a:endParaRPr lang="en-US"/>
           </a:p>
         </p:txBody>
       </p:sp>
@@ -2715,6 +2708,7 @@
           <a:p>
             <a:fld id="{B17E097D-BF14-0048-A1F1-91A4B3DB23CE}" type="datetimeFigureOut">
               <a:rPr lang="en-US" smtClean="0"/>
+              <a:t>4/12/26</a:t>
             </a:fld>
             <a:endParaRPr lang="en-US"/>
           </a:p>
@@ -2756,6 +2750,7 @@
           <a:p>
             <a:fld id="{2F29E7E3-3D05-DC41-B909-139336B5BB98}" type="slidenum">
               <a:rPr lang="en-US" smtClean="0"/>
+              <a:t>‹#›</a:t>
             </a:fld>
             <a:endParaRPr lang="en-US"/>
           </a:p>
@@ -2854,7 +2849,6 @@
               <a:rPr lang="en-US"/>
               <a:t>Click to edit Master text styles</a:t>
             </a:r>
-            <a:endParaRPr lang="en-US"/>
           </a:p>
           <a:p>
             <a:pPr lvl="1"/>
@@ -2862,7 +2856,6 @@
               <a:rPr lang="en-US"/>
               <a:t>Second level</a:t>
             </a:r>
-            <a:endParaRPr lang="en-US"/>
           </a:p>
           <a:p>
             <a:pPr lvl="2"/>
@@ -2870,7 +2863,6 @@
               <a:rPr lang="en-US"/>
               <a:t>Third level</a:t>
             </a:r>
-            <a:endParaRPr lang="en-US"/>
           </a:p>
           <a:p>
             <a:pPr lvl="3"/>
@@ -2878,7 +2870,6 @@
               <a:rPr lang="en-US"/>
               <a:t>Fourth level</a:t>
             </a:r>
-            <a:endParaRPr lang="en-US"/>
           </a:p>
           <a:p>
             <a:pPr lvl="4"/>
@@ -2925,6 +2916,7 @@
           <a:p>
             <a:fld id="{B17E097D-BF14-0048-A1F1-91A4B3DB23CE}" type="datetimeFigureOut">
               <a:rPr lang="en-US" smtClean="0"/>
+              <a:t>4/12/26</a:t>
             </a:fld>
             <a:endParaRPr lang="en-US"/>
           </a:p>
@@ -3002,6 +2994,7 @@
           <a:p>
             <a:fld id="{2F29E7E3-3D05-DC41-B909-139336B5BB98}" type="slidenum">
               <a:rPr lang="en-US" smtClean="0"/>
+              <a:t>‹#›</a:t>
             </a:fld>
             <a:endParaRPr lang="en-US"/>
           </a:p>
@@ -3407,14 +3400,6 @@
               </a:rPr>
               <a:t>Differential Diagnosis across the Parkinsonian Spectrum</a:t>
             </a:r>
-            <a:endParaRPr lang="en-US" sz="5400" b="1" kern="1200" dirty="0">
-              <a:solidFill>
-                <a:schemeClr val="bg1"/>
-              </a:solidFill>
-              <a:latin typeface="Century Gothic" panose="020B0502020202020204" pitchFamily="34" charset="0"/>
-              <a:ea typeface="+mn-ea"/>
-              <a:cs typeface="Segoe UI" panose="020B0502040204020203" pitchFamily="34" charset="0"/>
-            </a:endParaRPr>
           </a:p>
           <a:p>
             <a:pPr marL="12065" marR="5080" algn="ctr">
@@ -3456,8 +3441,8 @@
         </p:nvSpPr>
         <p:spPr>
           <a:xfrm>
-            <a:off x="133350" y="17858740"/>
-            <a:ext cx="8225155" cy="14799945"/>
+            <a:off x="133350" y="17422802"/>
+            <a:ext cx="8225155" cy="15235883"/>
           </a:xfrm>
           <a:prstGeom prst="rect">
             <a:avLst/>
@@ -3625,13 +3610,8 @@
                 <a:cs typeface="Times New Roman" panose="02020503050405090304" charset="0"/>
                 <a:sym typeface="+mn-ea"/>
               </a:rPr>
-              <a:t>Median imputation for continuous variables; constant "missing" imputation for categorical variables to handle high missingness rates.</a:t>
-            </a:r>
-            <a:endParaRPr lang="en-US" altLang="zh-CN" sz="3000" spc="-10" dirty="0">
-              <a:latin typeface="Times New Roman" panose="02020503050405090304" charset="0"/>
-              <a:cs typeface="Times New Roman" panose="02020503050405090304" charset="0"/>
-              <a:sym typeface="+mn-ea"/>
-            </a:endParaRPr>
+              <a:t>Median imputation for continuous variables; constant missing imputation for categorical variables to handle high missingness rates.</a:t>
+            </a:r>
           </a:p>
           <a:p>
             <a:pPr marL="527050" indent="-514350">
@@ -3677,13 +3657,8 @@
                 <a:cs typeface="Times New Roman" panose="02020503050405090304" charset="0"/>
                 <a:sym typeface="+mn-ea"/>
               </a:rPr>
-              <a:t>SMOTE applied to address class imbalance.</a:t>
-            </a:r>
-            <a:endParaRPr lang="en-US" altLang="zh-CN" sz="3000" spc="-10" dirty="0">
-              <a:latin typeface="Times New Roman" panose="02020503050405090304" charset="0"/>
-              <a:cs typeface="Times New Roman" panose="02020503050405090304" charset="0"/>
-              <a:sym typeface="+mn-ea"/>
-            </a:endParaRPr>
+              <a:t>SMOTE applied to address class imbalance in training.</a:t>
+            </a:r>
           </a:p>
           <a:p>
             <a:pPr marL="12700" indent="0">
@@ -3704,15 +3679,8 @@
                 <a:latin typeface="Times New Roman" panose="02020503050405090304" charset="0"/>
                 <a:cs typeface="Times New Roman" panose="02020503050405090304" charset="0"/>
               </a:rPr>
-              <a:t>5 Candidate Models: </a:t>
-            </a:r>
-            <a:endParaRPr lang="en-US" altLang="zh-CN" sz="3000" spc="-10" dirty="0">
-              <a:solidFill>
-                <a:srgbClr val="0070C0"/>
-              </a:solidFill>
-              <a:latin typeface="Times New Roman" panose="02020503050405090304" charset="0"/>
-              <a:cs typeface="Times New Roman" panose="02020503050405090304" charset="0"/>
-            </a:endParaRPr>
+              <a:t>6 Candidate Models: </a:t>
+            </a:r>
           </a:p>
           <a:p>
             <a:pPr marL="12700" indent="0">
@@ -3733,7 +3701,14 @@
                 <a:latin typeface="Times New Roman" panose="02020503050405090304" charset="0"/>
                 <a:cs typeface="Times New Roman" panose="02020503050405090304" charset="0"/>
               </a:rPr>
-              <a:t>Tabular Transformer, Logistic Regression, Random Forest, SVM, Gradient Boosting, KNN</a:t>
+              <a:t>Tabular Transformer, Logistic Regression, Random Forest, SVM, Gradient Boosting, K Neares</a:t>
+            </a:r>
+            <a:r>
+              <a:rPr lang="en-US" altLang="zh-CN" sz="3000" spc="-10" dirty="0">
+                <a:latin typeface="Times New Roman" panose="02020503050405090304" charset="0"/>
+                <a:cs typeface="Times New Roman" panose="02020503050405090304" charset="0"/>
+              </a:rPr>
+              <a:t>t Neighbors (KNN) models</a:t>
             </a:r>
             <a:endParaRPr lang="en-US" altLang="zh-CN" sz="3000" spc="-10" dirty="0">
               <a:solidFill>
@@ -3764,13 +3739,6 @@
               </a:rPr>
               <a:t>Model Selection:</a:t>
             </a:r>
-            <a:endParaRPr lang="en-US" altLang="zh-CN" sz="3000" spc="-10" dirty="0">
-              <a:solidFill>
-                <a:srgbClr val="0070C0"/>
-              </a:solidFill>
-              <a:latin typeface="Times New Roman" panose="02020503050405090304" charset="0"/>
-              <a:cs typeface="Times New Roman" panose="02020503050405090304" charset="0"/>
-            </a:endParaRPr>
           </a:p>
           <a:p>
             <a:pPr marL="469900" indent="-457200">
@@ -3791,15 +3759,8 @@
                 <a:latin typeface="Times New Roman" panose="02020503050405090304" charset="0"/>
                 <a:cs typeface="Times New Roman" panose="02020503050405090304" charset="0"/>
               </a:rPr>
-              <a:t>3-fold CV optimized on weighted F1</a:t>
-            </a:r>
-            <a:endParaRPr lang="en-US" altLang="zh-CN" sz="3000" spc="-10" dirty="0">
-              <a:solidFill>
-                <a:schemeClr val="tx1"/>
-              </a:solidFill>
-              <a:latin typeface="Times New Roman" panose="02020503050405090304" charset="0"/>
-              <a:cs typeface="Times New Roman" panose="02020503050405090304" charset="0"/>
-            </a:endParaRPr>
+              <a:t>3-fold CV optimized on weighted F1-scores with 20% holdout validation set</a:t>
+            </a:r>
           </a:p>
           <a:p>
             <a:pPr marL="469900" indent="-457200">
@@ -3822,13 +3783,6 @@
               </a:rPr>
               <a:t>Hyperparameter tuning via GridSearchCV with per-class threshold optimization</a:t>
             </a:r>
-            <a:endParaRPr lang="en-US" altLang="zh-CN" sz="3000" spc="-10" dirty="0">
-              <a:solidFill>
-                <a:schemeClr val="tx1"/>
-              </a:solidFill>
-              <a:latin typeface="Times New Roman" panose="02020503050405090304" charset="0"/>
-              <a:cs typeface="Times New Roman" panose="02020503050405090304" charset="0"/>
-            </a:endParaRPr>
           </a:p>
           <a:p>
             <a:pPr marL="469900" indent="-457200" algn="l">
@@ -3849,26 +3803,17 @@
                 <a:latin typeface="Times New Roman" panose="02020503050405090304" charset="0"/>
                 <a:cs typeface="Times New Roman" panose="02020503050405090304" charset="0"/>
               </a:rPr>
-              <a:t>Final model selected based on Accuracy, Macro AUC, Macro F1, and Kappa on a held-out test set (20%) Modelling Diagnosis</a:t>
-            </a:r>
-            <a:endParaRPr lang="en-US" altLang="zh-CN" sz="3000" spc="-10" dirty="0">
-              <a:solidFill>
-                <a:schemeClr val="tx1"/>
-              </a:solidFill>
-              <a:latin typeface="Times New Roman" panose="02020503050405090304" charset="0"/>
-              <a:cs typeface="Times New Roman" panose="02020503050405090304" charset="0"/>
-            </a:endParaRPr>
-          </a:p>
-          <a:p>
-            <a:pPr marL="12700" indent="0" algn="l">
+              <a:t>Final model selected based on Accuracy, Macro AUC, Macro F1, and Kappa </a:t>
+            </a:r>
+          </a:p>
+          <a:p>
+            <a:pPr marL="12700" algn="l">
               <a:lnSpc>
                 <a:spcPct val="100000"/>
               </a:lnSpc>
               <a:spcBef>
                 <a:spcPts val="395"/>
               </a:spcBef>
-              <a:buFont typeface="Arial" panose="020B0604020202090204" pitchFamily="34" charset="0"/>
-              <a:buNone/>
             </a:pPr>
             <a:r>
               <a:rPr lang="en-US" altLang="zh-CN" sz="3000" spc="-10" dirty="0">
@@ -3880,13 +3825,6 @@
               </a:rPr>
               <a:t>Model Diagonosis:</a:t>
             </a:r>
-            <a:endParaRPr lang="en-US" altLang="zh-CN" sz="3000" spc="-10" dirty="0">
-              <a:solidFill>
-                <a:srgbClr val="0070C0"/>
-              </a:solidFill>
-              <a:latin typeface="Times New Roman" panose="02020503050405090304" charset="0"/>
-              <a:cs typeface="Times New Roman" panose="02020503050405090304" charset="0"/>
-            </a:endParaRPr>
           </a:p>
           <a:p>
             <a:pPr marL="469900" indent="-457200">
@@ -3909,13 +3847,6 @@
               </a:rPr>
               <a:t>Direct three-class classification: PD, PD-plus, and Healthy Controls</a:t>
             </a:r>
-            <a:endParaRPr lang="en-US" altLang="zh-CN" sz="3000" spc="-10" dirty="0">
-              <a:solidFill>
-                <a:schemeClr val="tx1"/>
-              </a:solidFill>
-              <a:latin typeface="Times New Roman" panose="02020503050405090304" charset="0"/>
-              <a:cs typeface="Times New Roman" panose="02020503050405090304" charset="0"/>
-            </a:endParaRPr>
           </a:p>
           <a:p>
             <a:pPr marL="469900" indent="-457200">
@@ -3938,13 +3869,6 @@
               </a:rPr>
               <a:t>Tabular Transformer and five traditional ML models applied independently</a:t>
             </a:r>
-            <a:endParaRPr lang="en-US" altLang="zh-CN" sz="3000" spc="-10" dirty="0">
-              <a:solidFill>
-                <a:schemeClr val="tx1"/>
-              </a:solidFill>
-              <a:latin typeface="Times New Roman" panose="02020503050405090304" charset="0"/>
-              <a:cs typeface="Times New Roman" panose="02020503050405090304" charset="0"/>
-            </a:endParaRPr>
           </a:p>
           <a:p>
             <a:pPr marL="469900" indent="-457200">
@@ -3967,13 +3891,6 @@
               </a:rPr>
               <a:t>All models evaluated on the same held-out test set (20%)</a:t>
             </a:r>
-            <a:endParaRPr lang="en-US" altLang="zh-CN" sz="3000" spc="-10" dirty="0">
-              <a:solidFill>
-                <a:schemeClr val="tx1"/>
-              </a:solidFill>
-              <a:latin typeface="Times New Roman" panose="02020503050405090304" charset="0"/>
-              <a:cs typeface="Times New Roman" panose="02020503050405090304" charset="0"/>
-            </a:endParaRPr>
           </a:p>
         </p:txBody>
       </p:sp>
@@ -3986,7 +3903,7 @@
         <p:spPr>
           <a:xfrm>
             <a:off x="8576099" y="17787863"/>
-            <a:ext cx="17613482" cy="783590"/>
+            <a:ext cx="17613482" cy="707886"/>
           </a:xfrm>
           <a:prstGeom prst="rect">
             <a:avLst/>
@@ -4000,22 +3917,15 @@
           <a:lstStyle/>
           <a:p>
             <a:r>
-              <a:rPr lang="en-US" sz="4500" spc="-112" dirty="0">
+              <a:rPr lang="en-US" sz="4000" spc="-112" dirty="0">
                 <a:solidFill>
-                  <a:schemeClr val="tx2"/>
+                  <a:srgbClr val="0070C0"/>
                 </a:solidFill>
-                <a:latin typeface="Times New Roman" panose="02020503050405090304" charset="0"/>
-                <a:cs typeface="Times New Roman" panose="02020503050405090304" charset="0"/>
+                <a:latin typeface="Times New Roman" panose="02020603050405020304" pitchFamily="18" charset="0"/>
+                <a:cs typeface="Times New Roman" panose="02020603050405020304" pitchFamily="18" charset="0"/>
               </a:rPr>
               <a:t>1. Healthy Controls vs Parkinson’s</a:t>
             </a:r>
-            <a:endParaRPr lang="en-US" sz="4500" spc="-112" dirty="0">
-              <a:solidFill>
-                <a:schemeClr val="tx2"/>
-              </a:solidFill>
-              <a:latin typeface="Times New Roman" panose="02020503050405090304" charset="0"/>
-              <a:cs typeface="Times New Roman" panose="02020503050405090304" charset="0"/>
-            </a:endParaRPr>
           </a:p>
         </p:txBody>
       </p:sp>
@@ -4070,7 +3980,7 @@
         <p:spPr>
           <a:xfrm>
             <a:off x="8804064" y="4608008"/>
-            <a:ext cx="10201371" cy="706755"/>
+            <a:ext cx="11907731" cy="646331"/>
           </a:xfrm>
           <a:prstGeom prst="rect">
             <a:avLst/>
@@ -4089,22 +3999,15 @@
               </a:spcBef>
             </a:pPr>
             <a:r>
-              <a:rPr lang="en-US" sz="4000" spc="-10" dirty="0">
+              <a:rPr lang="en-US" sz="3600" spc="-10" dirty="0">
                 <a:solidFill>
-                  <a:schemeClr val="tx2"/>
+                  <a:srgbClr val="0070C0"/>
                 </a:solidFill>
                 <a:latin typeface="Times New Roman" panose="02020503050405090304" charset="0"/>
                 <a:cs typeface="Times New Roman" panose="02020503050405090304" charset="0"/>
               </a:rPr>
-              <a:t>Data</a:t>
-            </a:r>
-            <a:endParaRPr lang="en-US" sz="4000" spc="-10" dirty="0">
-              <a:solidFill>
-                <a:schemeClr val="tx2"/>
-              </a:solidFill>
-              <a:latin typeface="Times New Roman" panose="02020503050405090304" charset="0"/>
-              <a:cs typeface="Times New Roman" panose="02020503050405090304" charset="0"/>
-            </a:endParaRPr>
+              <a:t>Demographic and Clinical Characteristics by Diagnosis Group </a:t>
+            </a:r>
           </a:p>
         </p:txBody>
       </p:sp>
@@ -4117,7 +4020,7 @@
         <p:spPr>
           <a:xfrm>
             <a:off x="20943707" y="4715214"/>
-            <a:ext cx="17613482" cy="783590"/>
+            <a:ext cx="17613482" cy="707886"/>
           </a:xfrm>
           <a:prstGeom prst="rect">
             <a:avLst/>
@@ -4131,22 +4034,15 @@
           <a:lstStyle/>
           <a:p>
             <a:r>
-              <a:rPr lang="en-US" sz="4500" spc="-112" dirty="0">
+              <a:rPr lang="en-US" sz="4000" spc="-112" dirty="0">
                 <a:solidFill>
-                  <a:schemeClr val="tx2"/>
+                  <a:srgbClr val="0070C0"/>
                 </a:solidFill>
                 <a:latin typeface="Times New Roman" panose="02020503050405090304" charset="0"/>
                 <a:cs typeface="Times New Roman" panose="02020503050405090304" charset="0"/>
               </a:rPr>
-              <a:t>2. SHAP Analysis: Risk Drivers of redictions</a:t>
-            </a:r>
-            <a:endParaRPr lang="en-US" sz="4500" spc="-112" dirty="0">
-              <a:solidFill>
-                <a:schemeClr val="tx2"/>
-              </a:solidFill>
-              <a:latin typeface="Times New Roman" panose="02020503050405090304" charset="0"/>
-              <a:cs typeface="Times New Roman" panose="02020503050405090304" charset="0"/>
-            </a:endParaRPr>
+              <a:t>2. SHAP Analysis: Risk Drivers of Predictions</a:t>
+            </a:r>
           </a:p>
         </p:txBody>
       </p:sp>
@@ -4386,7 +4282,7 @@
         </p:nvSpPr>
         <p:spPr>
           <a:xfrm>
-            <a:off x="188404" y="17050756"/>
+            <a:off x="133159" y="16424272"/>
             <a:ext cx="8443444" cy="784830"/>
           </a:xfrm>
           <a:prstGeom prst="rect">
@@ -4470,7 +4366,7 @@
         </p:nvSpPr>
         <p:spPr>
           <a:xfrm>
-            <a:off x="20741005" y="24067135"/>
+            <a:off x="20767618" y="25927742"/>
             <a:ext cx="11642090" cy="783590"/>
           </a:xfrm>
           <a:prstGeom prst="rect">
@@ -4555,7 +4451,7 @@
           <p:nvPr/>
         </p:nvPicPr>
         <p:blipFill>
-          <a:blip r:embed="rId1">
+          <a:blip r:embed="rId3">
             <a:extLst>
               <a:ext uri="{28A0092B-C50C-407E-A947-70E740481C1C}">
                 <a14:useLocalDpi xmlns:a14="http://schemas.microsoft.com/office/drawing/2010/main" val="0"/>
@@ -4593,22 +4489,58 @@
           <p:cNvGraphicFramePr>
             <a:graphicFrameLocks noGrp="1"/>
           </p:cNvGraphicFramePr>
-          <p:nvPr/>
+          <p:nvPr>
+            <p:extLst>
+              <p:ext uri="{D42A27DB-BD31-4B8C-83A1-F6EECF244321}">
+                <p14:modId xmlns:p14="http://schemas.microsoft.com/office/powerpoint/2010/main" val="4071783618"/>
+              </p:ext>
+            </p:extLst>
+          </p:nvPr>
         </p:nvGraphicFramePr>
         <p:xfrm>
           <a:off x="8804257" y="5308270"/>
-          <a:ext cx="11966575" cy="12506325"/>
+          <a:ext cx="11966870" cy="12502475"/>
         </p:xfrm>
         <a:graphic>
           <a:graphicData uri="http://schemas.openxmlformats.org/drawingml/2006/table">
             <a:tbl>
               <a:tblPr/>
               <a:tblGrid>
-                <a:gridCol w="3064266"/>
-                <a:gridCol w="2225651"/>
-                <a:gridCol w="2225675"/>
-                <a:gridCol w="2225627"/>
-                <a:gridCol w="2225651"/>
+                <a:gridCol w="3064266">
+                  <a:extLst>
+                    <a:ext uri="{9D8B030D-6E8A-4147-A177-3AD203B41FA5}">
+                      <a16:colId xmlns:a16="http://schemas.microsoft.com/office/drawing/2014/main" val="20000"/>
+                    </a:ext>
+                  </a:extLst>
+                </a:gridCol>
+                <a:gridCol w="2225651">
+                  <a:extLst>
+                    <a:ext uri="{9D8B030D-6E8A-4147-A177-3AD203B41FA5}">
+                      <a16:colId xmlns:a16="http://schemas.microsoft.com/office/drawing/2014/main" val="20001"/>
+                    </a:ext>
+                  </a:extLst>
+                </a:gridCol>
+                <a:gridCol w="2225675">
+                  <a:extLst>
+                    <a:ext uri="{9D8B030D-6E8A-4147-A177-3AD203B41FA5}">
+                      <a16:colId xmlns:a16="http://schemas.microsoft.com/office/drawing/2014/main" val="20002"/>
+                    </a:ext>
+                  </a:extLst>
+                </a:gridCol>
+                <a:gridCol w="2225627">
+                  <a:extLst>
+                    <a:ext uri="{9D8B030D-6E8A-4147-A177-3AD203B41FA5}">
+                      <a16:colId xmlns:a16="http://schemas.microsoft.com/office/drawing/2014/main" val="20003"/>
+                    </a:ext>
+                  </a:extLst>
+                </a:gridCol>
+                <a:gridCol w="2225651">
+                  <a:extLst>
+                    <a:ext uri="{9D8B030D-6E8A-4147-A177-3AD203B41FA5}">
+                      <a16:colId xmlns:a16="http://schemas.microsoft.com/office/drawing/2014/main" val="20004"/>
+                    </a:ext>
+                  </a:extLst>
+                </a:gridCol>
               </a:tblGrid>
               <a:tr h="852805">
                 <a:tc>
@@ -4618,7 +4550,7 @@
                     <a:p>
                       <a:pPr algn="ctr" fontAlgn="ctr"/>
                       <a:r>
-                        <a:rPr lang="en-US" sz="3600" b="0">
+                        <a:rPr lang="en-US" sz="3600" b="0" dirty="0">
                           <a:solidFill>
                             <a:srgbClr val="000000"/>
                           </a:solidFill>
@@ -4628,14 +4560,6 @@
                         </a:rPr>
                         <a:t> </a:t>
                       </a:r>
-                      <a:endParaRPr lang="en-US" sz="3600" b="0">
-                        <a:solidFill>
-                          <a:srgbClr val="000000"/>
-                        </a:solidFill>
-                        <a:effectLst/>
-                        <a:latin typeface="Arial" panose="020B0604020202090204" pitchFamily="34" charset="0"/>
-                        <a:cs typeface="Arial" panose="020B0604020202090204" pitchFamily="34" charset="0"/>
-                      </a:endParaRPr>
                     </a:p>
                   </a:txBody>
                   <a:tcPr marL="10559" marR="10559" marT="5279" marB="5279" anchor="ctr">
@@ -4699,14 +4623,6 @@
                         </a:rPr>
                         <a:t>Overall</a:t>
                       </a:r>
-                      <a:endParaRPr lang="en-US" sz="3600" b="0">
-                        <a:solidFill>
-                          <a:srgbClr val="000000"/>
-                        </a:solidFill>
-                        <a:effectLst/>
-                        <a:latin typeface="Arial" panose="020B0604020202090204" pitchFamily="34" charset="0"/>
-                        <a:cs typeface="Arial" panose="020B0604020202090204" pitchFamily="34" charset="0"/>
-                      </a:endParaRPr>
                     </a:p>
                   </a:txBody>
                   <a:tcPr marL="10559" marR="10559" marT="5279" marB="5279" anchor="ctr">
@@ -4770,14 +4686,6 @@
                         </a:rPr>
                         <a:t>PD</a:t>
                       </a:r>
-                      <a:endParaRPr lang="en-US" sz="3600" b="0" dirty="0">
-                        <a:solidFill>
-                          <a:srgbClr val="000000"/>
-                        </a:solidFill>
-                        <a:effectLst/>
-                        <a:latin typeface="Arial" panose="020B0604020202090204" pitchFamily="34" charset="0"/>
-                        <a:cs typeface="Arial" panose="020B0604020202090204" pitchFamily="34" charset="0"/>
-                      </a:endParaRPr>
                     </a:p>
                   </a:txBody>
                   <a:tcPr marL="10559" marR="10559" marT="5279" marB="5279" anchor="ctr">
@@ -4841,14 +4749,6 @@
                         </a:rPr>
                         <a:t>Healthy control</a:t>
                       </a:r>
-                      <a:endParaRPr lang="en-US" sz="3600" b="0" dirty="0">
-                        <a:solidFill>
-                          <a:srgbClr val="000000"/>
-                        </a:solidFill>
-                        <a:effectLst/>
-                        <a:latin typeface="Arial" panose="020B0604020202090204" pitchFamily="34" charset="0"/>
-                        <a:cs typeface="Arial" panose="020B0604020202090204" pitchFamily="34" charset="0"/>
-                      </a:endParaRPr>
                     </a:p>
                   </a:txBody>
                   <a:tcPr marL="10559" marR="10559" marT="5279" marB="5279" anchor="ctr">
@@ -4912,14 +4812,6 @@
                         </a:rPr>
                         <a:t>PD-Plus</a:t>
                       </a:r>
-                      <a:endParaRPr lang="en-US" sz="3600" b="0" dirty="0">
-                        <a:solidFill>
-                          <a:srgbClr val="000000"/>
-                        </a:solidFill>
-                        <a:effectLst/>
-                        <a:latin typeface="Arial" panose="020B0604020202090204" pitchFamily="34" charset="0"/>
-                        <a:cs typeface="Arial" panose="020B0604020202090204" pitchFamily="34" charset="0"/>
-                      </a:endParaRPr>
                     </a:p>
                   </a:txBody>
                   <a:tcPr marL="10559" marR="10559" marT="5279" marB="5279" anchor="ctr">
@@ -4966,6 +4858,11 @@
                     </a:solidFill>
                   </a:tcPr>
                 </a:tc>
+                <a:extLst>
+                  <a:ext uri="{0D108BD9-81ED-4DB2-BD59-A6C34878D82A}">
+                    <a16:rowId xmlns:a16="http://schemas.microsoft.com/office/drawing/2014/main" val="10000"/>
+                  </a:ext>
+                </a:extLst>
               </a:tr>
               <a:tr h="612140">
                 <a:tc>
@@ -4985,14 +4882,6 @@
                         </a:rPr>
                         <a:t>Sample Size (n)</a:t>
                       </a:r>
-                      <a:endParaRPr lang="en-US" sz="3200" b="0" dirty="0">
-                        <a:solidFill>
-                          <a:srgbClr val="000000"/>
-                        </a:solidFill>
-                        <a:effectLst/>
-                        <a:latin typeface="Arial" panose="020B0604020202090204" pitchFamily="34" charset="0"/>
-                        <a:cs typeface="Arial" panose="020B0604020202090204" pitchFamily="34" charset="0"/>
-                      </a:endParaRPr>
                     </a:p>
                   </a:txBody>
                   <a:tcPr marL="10559" marR="10559" marT="5279" marB="5279" anchor="ctr">
@@ -5053,11 +4942,6 @@
                         </a:rPr>
                         <a:t>3541</a:t>
                       </a:r>
-                      <a:endParaRPr lang="en-US" sz="3200" b="0" dirty="0">
-                        <a:effectLst/>
-                        <a:latin typeface="Arial" panose="020B0604020202090204" pitchFamily="34" charset="0"/>
-                        <a:cs typeface="Arial" panose="020B0604020202090204" pitchFamily="34" charset="0"/>
-                      </a:endParaRPr>
                     </a:p>
                   </a:txBody>
                   <a:tcPr marL="10559" marR="10559" marT="10559" marB="10559" anchor="ctr">
@@ -5114,11 +4998,6 @@
                         </a:rPr>
                         <a:t>2852</a:t>
                       </a:r>
-                      <a:endParaRPr lang="en-US" sz="3200" b="0" dirty="0">
-                        <a:effectLst/>
-                        <a:latin typeface="Arial" panose="020B0604020202090204" pitchFamily="34" charset="0"/>
-                        <a:cs typeface="Arial" panose="020B0604020202090204" pitchFamily="34" charset="0"/>
-                      </a:endParaRPr>
                     </a:p>
                   </a:txBody>
                   <a:tcPr marL="10559" marR="10559" marT="10559" marB="10559" anchor="ctr">
@@ -5175,11 +5054,6 @@
                         </a:rPr>
                         <a:t>410</a:t>
                       </a:r>
-                      <a:endParaRPr lang="en-US" sz="3200" b="0" dirty="0">
-                        <a:effectLst/>
-                        <a:latin typeface="Arial" panose="020B0604020202090204" pitchFamily="34" charset="0"/>
-                        <a:cs typeface="Arial" panose="020B0604020202090204" pitchFamily="34" charset="0"/>
-                      </a:endParaRPr>
                     </a:p>
                   </a:txBody>
                   <a:tcPr marL="10559" marR="10559" marT="10559" marB="10559" anchor="ctr">
@@ -5236,11 +5110,6 @@
                         </a:rPr>
                         <a:t>171</a:t>
                       </a:r>
-                      <a:endParaRPr lang="en-US" sz="3200" b="0" dirty="0">
-                        <a:effectLst/>
-                        <a:latin typeface="Arial" panose="020B0604020202090204" pitchFamily="34" charset="0"/>
-                        <a:cs typeface="Arial" panose="020B0604020202090204" pitchFamily="34" charset="0"/>
-                      </a:endParaRPr>
                     </a:p>
                   </a:txBody>
                   <a:tcPr marL="10559" marR="10559" marT="10559" marB="10559" anchor="ctr">
@@ -5283,6 +5152,11 @@
                     <a:noFill/>
                   </a:tcPr>
                 </a:tc>
+                <a:extLst>
+                  <a:ext uri="{0D108BD9-81ED-4DB2-BD59-A6C34878D82A}">
+                    <a16:rowId xmlns:a16="http://schemas.microsoft.com/office/drawing/2014/main" val="10001"/>
+                  </a:ext>
+                </a:extLst>
               </a:tr>
               <a:tr h="979000">
                 <a:tc>
@@ -5302,14 +5176,6 @@
                         </a:rPr>
                         <a:t>Current Age</a:t>
                       </a:r>
-                      <a:endParaRPr lang="en-US" sz="3200" b="0" dirty="0">
-                        <a:solidFill>
-                          <a:srgbClr val="000000"/>
-                        </a:solidFill>
-                        <a:effectLst/>
-                        <a:latin typeface="Arial" panose="020B0604020202090204" pitchFamily="34" charset="0"/>
-                        <a:cs typeface="Arial" panose="020B0604020202090204" pitchFamily="34" charset="0"/>
-                      </a:endParaRPr>
                     </a:p>
                   </a:txBody>
                   <a:tcPr marL="10559" marR="10559" marT="5279" marB="5279" anchor="ctr">
@@ -5370,11 +5236,6 @@
                         </a:rPr>
                         <a:t>66.20 (10.04)</a:t>
                       </a:r>
-                      <a:endParaRPr lang="en-US" sz="3200" b="0">
-                        <a:effectLst/>
-                        <a:latin typeface="Arial" panose="020B0604020202090204" pitchFamily="34" charset="0"/>
-                        <a:cs typeface="Arial" panose="020B0604020202090204" pitchFamily="34" charset="0"/>
-                      </a:endParaRPr>
                     </a:p>
                   </a:txBody>
                   <a:tcPr marL="10559" marR="10559" marT="10559" marB="10559" anchor="ctr">
@@ -5424,34 +5285,24 @@
                     <a:p>
                       <a:pPr algn="ctr"/>
                       <a:r>
-                        <a:rPr lang="en-US" sz="3200" b="0">
+                        <a:rPr lang="en-US" sz="3200" b="0" dirty="0">
                           <a:effectLst/>
                           <a:latin typeface="Arial" panose="020B0604020202090204" pitchFamily="34" charset="0"/>
                           <a:cs typeface="Arial" panose="020B0604020202090204" pitchFamily="34" charset="0"/>
                         </a:rPr>
                         <a:t>66.59 </a:t>
                       </a:r>
-                      <a:endParaRPr lang="en-US" sz="3200" b="0">
-                        <a:effectLst/>
-                        <a:latin typeface="Arial" panose="020B0604020202090204" pitchFamily="34" charset="0"/>
-                        <a:cs typeface="Arial" panose="020B0604020202090204" pitchFamily="34" charset="0"/>
-                      </a:endParaRPr>
                     </a:p>
                     <a:p>
                       <a:pPr algn="ctr"/>
                       <a:r>
-                        <a:rPr lang="en-US" sz="3200" b="0">
+                        <a:rPr lang="en-US" sz="3200" b="0" dirty="0">
                           <a:effectLst/>
                           <a:latin typeface="Arial" panose="020B0604020202090204" pitchFamily="34" charset="0"/>
                           <a:cs typeface="Arial" panose="020B0604020202090204" pitchFamily="34" charset="0"/>
                         </a:rPr>
                         <a:t>(9.59)</a:t>
                       </a:r>
-                      <a:endParaRPr lang="en-US" sz="3200" b="0">
-                        <a:effectLst/>
-                        <a:latin typeface="Arial" panose="020B0604020202090204" pitchFamily="34" charset="0"/>
-                        <a:cs typeface="Arial" panose="020B0604020202090204" pitchFamily="34" charset="0"/>
-                      </a:endParaRPr>
                     </a:p>
                   </a:txBody>
                   <a:tcPr marL="10559" marR="10559" marT="10559" marB="10559" anchor="ctr">
@@ -5508,11 +5359,6 @@
                         </a:rPr>
                         <a:t>62.54 (12.22)</a:t>
                       </a:r>
-                      <a:endParaRPr lang="en-US" sz="3200" b="0">
-                        <a:effectLst/>
-                        <a:latin typeface="Arial" panose="020B0604020202090204" pitchFamily="34" charset="0"/>
-                        <a:cs typeface="Arial" panose="020B0604020202090204" pitchFamily="34" charset="0"/>
-                      </a:endParaRPr>
                     </a:p>
                   </a:txBody>
                   <a:tcPr marL="10559" marR="10559" marT="10559" marB="10559" anchor="ctr">
@@ -5569,11 +5415,6 @@
                         </a:rPr>
                         <a:t>66.64 </a:t>
                       </a:r>
-                      <a:endParaRPr lang="en-US" sz="3200" b="0">
-                        <a:effectLst/>
-                        <a:latin typeface="Arial" panose="020B0604020202090204" pitchFamily="34" charset="0"/>
-                        <a:cs typeface="Arial" panose="020B0604020202090204" pitchFamily="34" charset="0"/>
-                      </a:endParaRPr>
                     </a:p>
                     <a:p>
                       <a:pPr algn="ctr"/>
@@ -5585,11 +5426,6 @@
                         </a:rPr>
                         <a:t>(11.71)</a:t>
                       </a:r>
-                      <a:endParaRPr lang="en-US" sz="3200" b="0">
-                        <a:effectLst/>
-                        <a:latin typeface="Arial" panose="020B0604020202090204" pitchFamily="34" charset="0"/>
-                        <a:cs typeface="Arial" panose="020B0604020202090204" pitchFamily="34" charset="0"/>
-                      </a:endParaRPr>
                     </a:p>
                   </a:txBody>
                   <a:tcPr marL="10559" marR="10559" marT="10559" marB="10559" anchor="ctr">
@@ -5632,6 +5468,11 @@
                     <a:noFill/>
                   </a:tcPr>
                 </a:tc>
+                <a:extLst>
+                  <a:ext uri="{0D108BD9-81ED-4DB2-BD59-A6C34878D82A}">
+                    <a16:rowId xmlns:a16="http://schemas.microsoft.com/office/drawing/2014/main" val="10002"/>
+                  </a:ext>
+                </a:extLst>
               </a:tr>
               <a:tr h="979000">
                 <a:tc>
@@ -5651,14 +5492,6 @@
                         </a:rPr>
                         <a:t>Number of Males</a:t>
                       </a:r>
-                      <a:endParaRPr lang="en-US" sz="3200" b="0" dirty="0">
-                        <a:solidFill>
-                          <a:srgbClr val="000000"/>
-                        </a:solidFill>
-                        <a:effectLst/>
-                        <a:latin typeface="Arial" panose="020B0604020202090204" pitchFamily="34" charset="0"/>
-                        <a:cs typeface="Arial" panose="020B0604020202090204" pitchFamily="34" charset="0"/>
-                      </a:endParaRPr>
                     </a:p>
                   </a:txBody>
                   <a:tcPr marL="10559" marR="10559" marT="5279" marB="5279" anchor="ctr">
@@ -5719,11 +5552,6 @@
                         </a:rPr>
                         <a:t>1804 (50.9%)</a:t>
                       </a:r>
-                      <a:endParaRPr lang="en-US" sz="3200" b="0" dirty="0">
-                        <a:effectLst/>
-                        <a:latin typeface="Arial" panose="020B0604020202090204" pitchFamily="34" charset="0"/>
-                        <a:cs typeface="Arial" panose="020B0604020202090204" pitchFamily="34" charset="0"/>
-                      </a:endParaRPr>
                     </a:p>
                   </a:txBody>
                   <a:tcPr marL="10559" marR="10559" marT="10559" marB="10559" anchor="ctr">
@@ -5780,11 +5608,6 @@
                         </a:rPr>
                         <a:t>1612 (56.5%)</a:t>
                       </a:r>
-                      <a:endParaRPr lang="en-US" sz="3200" b="0" dirty="0">
-                        <a:effectLst/>
-                        <a:latin typeface="Arial" panose="020B0604020202090204" pitchFamily="34" charset="0"/>
-                        <a:cs typeface="Arial" panose="020B0604020202090204" pitchFamily="34" charset="0"/>
-                      </a:endParaRPr>
                     </a:p>
                   </a:txBody>
                   <a:tcPr marL="10559" marR="10559" marT="10559" marB="10559" anchor="ctr">
@@ -5841,11 +5664,6 @@
                         </a:rPr>
                         <a:t>181</a:t>
                       </a:r>
-                      <a:endParaRPr lang="en-US" sz="3200" b="0" dirty="0">
-                        <a:effectLst/>
-                        <a:latin typeface="Arial" panose="020B0604020202090204" pitchFamily="34" charset="0"/>
-                        <a:cs typeface="Arial" panose="020B0604020202090204" pitchFamily="34" charset="0"/>
-                      </a:endParaRPr>
                     </a:p>
                     <a:p>
                       <a:pPr algn="ctr"/>
@@ -5857,11 +5675,6 @@
                         </a:rPr>
                         <a:t>(44.1%)</a:t>
                       </a:r>
-                      <a:endParaRPr lang="en-US" sz="3200" b="0" dirty="0">
-                        <a:effectLst/>
-                        <a:latin typeface="Arial" panose="020B0604020202090204" pitchFamily="34" charset="0"/>
-                        <a:cs typeface="Arial" panose="020B0604020202090204" pitchFamily="34" charset="0"/>
-                      </a:endParaRPr>
                     </a:p>
                   </a:txBody>
                   <a:tcPr marL="10559" marR="10559" marT="10559" marB="10559" anchor="ctr">
@@ -5918,11 +5731,6 @@
                         </a:rPr>
                         <a:t>78</a:t>
                       </a:r>
-                      <a:endParaRPr lang="en-US" sz="3200" b="0" dirty="0">
-                        <a:effectLst/>
-                        <a:latin typeface="Arial" panose="020B0604020202090204" pitchFamily="34" charset="0"/>
-                        <a:cs typeface="Arial" panose="020B0604020202090204" pitchFamily="34" charset="0"/>
-                      </a:endParaRPr>
                     </a:p>
                     <a:p>
                       <a:pPr algn="ctr"/>
@@ -5934,11 +5742,6 @@
                         </a:rPr>
                         <a:t>(45.6%)</a:t>
                       </a:r>
-                      <a:endParaRPr lang="en-US" sz="3200" b="0" dirty="0">
-                        <a:effectLst/>
-                        <a:latin typeface="Arial" panose="020B0604020202090204" pitchFamily="34" charset="0"/>
-                        <a:cs typeface="Arial" panose="020B0604020202090204" pitchFamily="34" charset="0"/>
-                      </a:endParaRPr>
                     </a:p>
                   </a:txBody>
                   <a:tcPr marL="10559" marR="10559" marT="10559" marB="10559" anchor="ctr">
@@ -5981,6 +5784,11 @@
                     <a:noFill/>
                   </a:tcPr>
                 </a:tc>
+                <a:extLst>
+                  <a:ext uri="{0D108BD9-81ED-4DB2-BD59-A6C34878D82A}">
+                    <a16:rowId xmlns:a16="http://schemas.microsoft.com/office/drawing/2014/main" val="10003"/>
+                  </a:ext>
+                </a:extLst>
               </a:tr>
               <a:tr h="691515">
                 <a:tc>
@@ -6000,14 +5808,6 @@
                         </a:rPr>
                         <a:t>Disease Duration</a:t>
                       </a:r>
-                      <a:endParaRPr lang="en-US" sz="3200" b="0" dirty="0">
-                        <a:solidFill>
-                          <a:srgbClr val="000000"/>
-                        </a:solidFill>
-                        <a:effectLst/>
-                        <a:latin typeface="Arial" panose="020B0604020202090204" pitchFamily="34" charset="0"/>
-                        <a:cs typeface="Arial" panose="020B0604020202090204" pitchFamily="34" charset="0"/>
-                      </a:endParaRPr>
                     </a:p>
                   </a:txBody>
                   <a:tcPr marL="10559" marR="10559" marT="5279" marB="5279" anchor="ctr">
@@ -6068,11 +5868,6 @@
                         </a:rPr>
                         <a:t>9.64</a:t>
                       </a:r>
-                      <a:endParaRPr lang="en-US" sz="3200" b="0" dirty="0">
-                        <a:effectLst/>
-                        <a:latin typeface="Arial" panose="020B0604020202090204" pitchFamily="34" charset="0"/>
-                        <a:cs typeface="Arial" panose="020B0604020202090204" pitchFamily="34" charset="0"/>
-                      </a:endParaRPr>
                     </a:p>
                     <a:p>
                       <a:pPr algn="ctr"/>
@@ -6084,11 +5879,6 @@
                         </a:rPr>
                         <a:t>(6.01)</a:t>
                       </a:r>
-                      <a:endParaRPr lang="en-US" sz="3200" b="0" dirty="0">
-                        <a:effectLst/>
-                        <a:latin typeface="Arial" panose="020B0604020202090204" pitchFamily="34" charset="0"/>
-                        <a:cs typeface="Arial" panose="020B0604020202090204" pitchFamily="34" charset="0"/>
-                      </a:endParaRPr>
                     </a:p>
                   </a:txBody>
                   <a:tcPr marL="10559" marR="10559" marT="10559" marB="10559" anchor="ctr">
@@ -6138,34 +5928,24 @@
                     <a:p>
                       <a:pPr algn="ctr"/>
                       <a:r>
-                        <a:rPr lang="en-US" sz="3200" b="0">
+                        <a:rPr lang="en-US" sz="3200" b="0" dirty="0">
                           <a:effectLst/>
                           <a:latin typeface="Arial" panose="020B0604020202090204" pitchFamily="34" charset="0"/>
                           <a:cs typeface="Arial" panose="020B0604020202090204" pitchFamily="34" charset="0"/>
                         </a:rPr>
                         <a:t>9.83</a:t>
                       </a:r>
-                      <a:endParaRPr lang="en-US" sz="3200" b="0">
-                        <a:effectLst/>
-                        <a:latin typeface="Arial" panose="020B0604020202090204" pitchFamily="34" charset="0"/>
-                        <a:cs typeface="Arial" panose="020B0604020202090204" pitchFamily="34" charset="0"/>
-                      </a:endParaRPr>
                     </a:p>
                     <a:p>
                       <a:pPr algn="ctr"/>
                       <a:r>
-                        <a:rPr lang="en-US" sz="3200" b="0">
+                        <a:rPr lang="en-US" sz="3200" b="0" dirty="0">
                           <a:effectLst/>
                           <a:latin typeface="Arial" panose="020B0604020202090204" pitchFamily="34" charset="0"/>
                           <a:cs typeface="Arial" panose="020B0604020202090204" pitchFamily="34" charset="0"/>
                         </a:rPr>
                         <a:t>(5.98)</a:t>
                       </a:r>
-                      <a:endParaRPr lang="en-US" sz="3200" b="0">
-                        <a:effectLst/>
-                        <a:latin typeface="Arial" panose="020B0604020202090204" pitchFamily="34" charset="0"/>
-                        <a:cs typeface="Arial" panose="020B0604020202090204" pitchFamily="34" charset="0"/>
-                      </a:endParaRPr>
                     </a:p>
                   </a:txBody>
                   <a:tcPr marL="10559" marR="10559" marT="10559" marB="10559" anchor="ctr">
@@ -6222,11 +6002,6 @@
                         </a:rPr>
                         <a:t>---</a:t>
                       </a:r>
-                      <a:endParaRPr lang="en-US" sz="3200" b="0" dirty="0">
-                        <a:effectLst/>
-                        <a:latin typeface="Arial" panose="020B0604020202090204" pitchFamily="34" charset="0"/>
-                        <a:cs typeface="Arial" panose="020B0604020202090204" pitchFamily="34" charset="0"/>
-                      </a:endParaRPr>
                     </a:p>
                   </a:txBody>
                   <a:tcPr marL="10559" marR="10559" marT="10559" marB="10559" anchor="ctr">
@@ -6283,11 +6058,6 @@
                         </a:rPr>
                         <a:t>6.05</a:t>
                       </a:r>
-                      <a:endParaRPr lang="en-US" sz="3200" b="0" dirty="0">
-                        <a:effectLst/>
-                        <a:latin typeface="Arial" panose="020B0604020202090204" pitchFamily="34" charset="0"/>
-                        <a:cs typeface="Arial" panose="020B0604020202090204" pitchFamily="34" charset="0"/>
-                      </a:endParaRPr>
                     </a:p>
                     <a:p>
                       <a:pPr algn="ctr"/>
@@ -6299,11 +6069,6 @@
                         </a:rPr>
                         <a:t>(5.50)</a:t>
                       </a:r>
-                      <a:endParaRPr lang="en-US" sz="3200" b="0" dirty="0">
-                        <a:effectLst/>
-                        <a:latin typeface="Arial" panose="020B0604020202090204" pitchFamily="34" charset="0"/>
-                        <a:cs typeface="Arial" panose="020B0604020202090204" pitchFamily="34" charset="0"/>
-                      </a:endParaRPr>
                     </a:p>
                   </a:txBody>
                   <a:tcPr marL="10559" marR="10559" marT="10559" marB="10559" anchor="ctr">
@@ -6346,6 +6111,11 @@
                     <a:noFill/>
                   </a:tcPr>
                 </a:tc>
+                <a:extLst>
+                  <a:ext uri="{0D108BD9-81ED-4DB2-BD59-A6C34878D82A}">
+                    <a16:rowId xmlns:a16="http://schemas.microsoft.com/office/drawing/2014/main" val="10004"/>
+                  </a:ext>
+                </a:extLst>
               </a:tr>
               <a:tr h="842159">
                 <a:tc>
@@ -6365,14 +6135,6 @@
                         </a:rPr>
                         <a:t>MoCA Score</a:t>
                       </a:r>
-                      <a:endParaRPr lang="en-US" sz="3200" b="0" dirty="0">
-                        <a:solidFill>
-                          <a:srgbClr val="000000"/>
-                        </a:solidFill>
-                        <a:effectLst/>
-                        <a:latin typeface="Arial" panose="020B0604020202090204" pitchFamily="34" charset="0"/>
-                        <a:cs typeface="Arial" panose="020B0604020202090204" pitchFamily="34" charset="0"/>
-                      </a:endParaRPr>
                     </a:p>
                   </a:txBody>
                   <a:tcPr marL="10559" marR="10559" marT="5279" marB="5279" anchor="ctr">
@@ -6433,11 +6195,6 @@
                         </a:rPr>
                         <a:t>26.70 </a:t>
                       </a:r>
-                      <a:endParaRPr lang="en-US" sz="3200" b="0">
-                        <a:effectLst/>
-                        <a:latin typeface="Arial" panose="020B0604020202090204" pitchFamily="34" charset="0"/>
-                        <a:cs typeface="Arial" panose="020B0604020202090204" pitchFamily="34" charset="0"/>
-                      </a:endParaRPr>
                     </a:p>
                     <a:p>
                       <a:pPr algn="ctr"/>
@@ -6449,11 +6206,6 @@
                         </a:rPr>
                         <a:t>(2.71)</a:t>
                       </a:r>
-                      <a:endParaRPr lang="en-US" sz="3200" b="0">
-                        <a:effectLst/>
-                        <a:latin typeface="Arial" panose="020B0604020202090204" pitchFamily="34" charset="0"/>
-                        <a:cs typeface="Arial" panose="020B0604020202090204" pitchFamily="34" charset="0"/>
-                      </a:endParaRPr>
                     </a:p>
                   </a:txBody>
                   <a:tcPr marL="10559" marR="10559" marT="10559" marB="10559" anchor="ctr">
@@ -6510,11 +6262,6 @@
                         </a:rPr>
                         <a:t>26.58 </a:t>
                       </a:r>
-                      <a:endParaRPr lang="en-US" sz="3200" b="0">
-                        <a:effectLst/>
-                        <a:latin typeface="Arial" panose="020B0604020202090204" pitchFamily="34" charset="0"/>
-                        <a:cs typeface="Arial" panose="020B0604020202090204" pitchFamily="34" charset="0"/>
-                      </a:endParaRPr>
                     </a:p>
                     <a:p>
                       <a:pPr algn="ctr"/>
@@ -6526,11 +6273,6 @@
                         </a:rPr>
                         <a:t>(2.53)</a:t>
                       </a:r>
-                      <a:endParaRPr lang="en-US" sz="3200" b="0">
-                        <a:effectLst/>
-                        <a:latin typeface="Arial" panose="020B0604020202090204" pitchFamily="34" charset="0"/>
-                        <a:cs typeface="Arial" panose="020B0604020202090204" pitchFamily="34" charset="0"/>
-                      </a:endParaRPr>
                     </a:p>
                   </a:txBody>
                   <a:tcPr marL="10559" marR="10559" marT="10559" marB="10559" anchor="ctr">
@@ -6587,11 +6329,6 @@
                         </a:rPr>
                         <a:t>27.78 </a:t>
                       </a:r>
-                      <a:endParaRPr lang="en-US" sz="3200" b="0">
-                        <a:effectLst/>
-                        <a:latin typeface="Arial" panose="020B0604020202090204" pitchFamily="34" charset="0"/>
-                        <a:cs typeface="Arial" panose="020B0604020202090204" pitchFamily="34" charset="0"/>
-                      </a:endParaRPr>
                     </a:p>
                     <a:p>
                       <a:pPr algn="ctr"/>
@@ -6603,11 +6340,6 @@
                         </a:rPr>
                         <a:t>(3.15)</a:t>
                       </a:r>
-                      <a:endParaRPr lang="en-US" sz="3200" b="0">
-                        <a:effectLst/>
-                        <a:latin typeface="Arial" panose="020B0604020202090204" pitchFamily="34" charset="0"/>
-                        <a:cs typeface="Arial" panose="020B0604020202090204" pitchFamily="34" charset="0"/>
-                      </a:endParaRPr>
                     </a:p>
                   </a:txBody>
                   <a:tcPr marL="10559" marR="10559" marT="10559" marB="10559" anchor="ctr">
@@ -6664,11 +6396,6 @@
                         </a:rPr>
                         <a:t>22.00 </a:t>
                       </a:r>
-                      <a:endParaRPr lang="en-US" sz="3200" b="0">
-                        <a:effectLst/>
-                        <a:latin typeface="Arial" panose="020B0604020202090204" pitchFamily="34" charset="0"/>
-                        <a:cs typeface="Arial" panose="020B0604020202090204" pitchFamily="34" charset="0"/>
-                      </a:endParaRPr>
                     </a:p>
                     <a:p>
                       <a:pPr algn="ctr"/>
@@ -6680,11 +6407,6 @@
                         </a:rPr>
                         <a:t>(nan)</a:t>
                       </a:r>
-                      <a:endParaRPr lang="en-US" sz="3200" b="0">
-                        <a:effectLst/>
-                        <a:latin typeface="Arial" panose="020B0604020202090204" pitchFamily="34" charset="0"/>
-                        <a:cs typeface="Arial" panose="020B0604020202090204" pitchFamily="34" charset="0"/>
-                      </a:endParaRPr>
                     </a:p>
                   </a:txBody>
                   <a:tcPr marL="10559" marR="10559" marT="10559" marB="10559" anchor="ctr">
@@ -6727,6 +6449,11 @@
                     <a:noFill/>
                   </a:tcPr>
                 </a:tc>
+                <a:extLst>
+                  <a:ext uri="{0D108BD9-81ED-4DB2-BD59-A6C34878D82A}">
+                    <a16:rowId xmlns:a16="http://schemas.microsoft.com/office/drawing/2014/main" val="10005"/>
+                  </a:ext>
+                </a:extLst>
               </a:tr>
               <a:tr h="979000">
                 <a:tc>
@@ -6746,14 +6473,6 @@
                         </a:rPr>
                         <a:t>BDI Score</a:t>
                       </a:r>
-                      <a:endParaRPr lang="en-US" sz="3200" b="0" dirty="0">
-                        <a:solidFill>
-                          <a:srgbClr val="000000"/>
-                        </a:solidFill>
-                        <a:effectLst/>
-                        <a:latin typeface="Arial" panose="020B0604020202090204" pitchFamily="34" charset="0"/>
-                        <a:cs typeface="Arial" panose="020B0604020202090204" pitchFamily="34" charset="0"/>
-                      </a:endParaRPr>
                     </a:p>
                   </a:txBody>
                   <a:tcPr marL="10559" marR="10559" marT="5279" marB="5279" anchor="ctr">
@@ -6814,11 +6533,6 @@
                         </a:rPr>
                         <a:t>9.65 </a:t>
                       </a:r>
-                      <a:endParaRPr lang="en-US" sz="3200" b="0" dirty="0">
-                        <a:effectLst/>
-                        <a:latin typeface="Arial" panose="020B0604020202090204" pitchFamily="34" charset="0"/>
-                        <a:cs typeface="Arial" panose="020B0604020202090204" pitchFamily="34" charset="0"/>
-                      </a:endParaRPr>
                     </a:p>
                     <a:p>
                       <a:pPr algn="ctr"/>
@@ -6830,11 +6544,6 @@
                         </a:rPr>
                         <a:t>(7.53)</a:t>
                       </a:r>
-                      <a:endParaRPr lang="en-US" sz="3200" b="0" dirty="0">
-                        <a:effectLst/>
-                        <a:latin typeface="Arial" panose="020B0604020202090204" pitchFamily="34" charset="0"/>
-                        <a:cs typeface="Arial" panose="020B0604020202090204" pitchFamily="34" charset="0"/>
-                      </a:endParaRPr>
                     </a:p>
                   </a:txBody>
                   <a:tcPr marL="10559" marR="10559" marT="10559" marB="10559" anchor="ctr">
@@ -6891,11 +6600,6 @@
                         </a:rPr>
                         <a:t>9.66 </a:t>
                       </a:r>
-                      <a:endParaRPr lang="en-US" sz="3200" b="0" dirty="0">
-                        <a:effectLst/>
-                        <a:latin typeface="Arial" panose="020B0604020202090204" pitchFamily="34" charset="0"/>
-                        <a:cs typeface="Arial" panose="020B0604020202090204" pitchFamily="34" charset="0"/>
-                      </a:endParaRPr>
                     </a:p>
                     <a:p>
                       <a:pPr algn="ctr"/>
@@ -6907,11 +6611,6 @@
                         </a:rPr>
                         <a:t>(7.35)</a:t>
                       </a:r>
-                      <a:endParaRPr lang="en-US" sz="3200" b="0" dirty="0">
-                        <a:effectLst/>
-                        <a:latin typeface="Arial" panose="020B0604020202090204" pitchFamily="34" charset="0"/>
-                        <a:cs typeface="Arial" panose="020B0604020202090204" pitchFamily="34" charset="0"/>
-                      </a:endParaRPr>
                     </a:p>
                   </a:txBody>
                   <a:tcPr marL="10559" marR="10559" marT="10559" marB="10559" anchor="ctr">
@@ -6968,11 +6667,6 @@
                         </a:rPr>
                         <a:t>6.24 </a:t>
                       </a:r>
-                      <a:endParaRPr lang="en-US" sz="3200" b="0">
-                        <a:effectLst/>
-                        <a:latin typeface="Arial" panose="020B0604020202090204" pitchFamily="34" charset="0"/>
-                        <a:cs typeface="Arial" panose="020B0604020202090204" pitchFamily="34" charset="0"/>
-                      </a:endParaRPr>
                     </a:p>
                     <a:p>
                       <a:pPr algn="ctr"/>
@@ -6984,11 +6678,6 @@
                         </a:rPr>
                         <a:t>(5.93)</a:t>
                       </a:r>
-                      <a:endParaRPr lang="en-US" sz="3200" b="0">
-                        <a:effectLst/>
-                        <a:latin typeface="Arial" panose="020B0604020202090204" pitchFamily="34" charset="0"/>
-                        <a:cs typeface="Arial" panose="020B0604020202090204" pitchFamily="34" charset="0"/>
-                      </a:endParaRPr>
                     </a:p>
                   </a:txBody>
                   <a:tcPr marL="10559" marR="10559" marT="10559" marB="10559" anchor="ctr">
@@ -7045,11 +6734,6 @@
                         </a:rPr>
                         <a:t>16.76 (10.45)</a:t>
                       </a:r>
-                      <a:endParaRPr lang="en-US" sz="3200" b="0">
-                        <a:effectLst/>
-                        <a:latin typeface="Arial" panose="020B0604020202090204" pitchFamily="34" charset="0"/>
-                        <a:cs typeface="Arial" panose="020B0604020202090204" pitchFamily="34" charset="0"/>
-                      </a:endParaRPr>
                     </a:p>
                   </a:txBody>
                   <a:tcPr marL="10559" marR="10559" marT="10559" marB="10559" anchor="ctr">
@@ -7092,6 +6776,11 @@
                     <a:noFill/>
                   </a:tcPr>
                 </a:tc>
+                <a:extLst>
+                  <a:ext uri="{0D108BD9-81ED-4DB2-BD59-A6C34878D82A}">
+                    <a16:rowId xmlns:a16="http://schemas.microsoft.com/office/drawing/2014/main" val="10006"/>
+                  </a:ext>
+                </a:extLst>
               </a:tr>
               <a:tr h="705319">
                 <a:tc>
@@ -7111,14 +6800,6 @@
                         </a:rPr>
                         <a:t>MBI Score</a:t>
                       </a:r>
-                      <a:endParaRPr lang="en-US" sz="3200" b="0" dirty="0">
-                        <a:solidFill>
-                          <a:srgbClr val="000000"/>
-                        </a:solidFill>
-                        <a:effectLst/>
-                        <a:latin typeface="Arial" panose="020B0604020202090204" pitchFamily="34" charset="0"/>
-                        <a:cs typeface="Arial" panose="020B0604020202090204" pitchFamily="34" charset="0"/>
-                      </a:endParaRPr>
                     </a:p>
                   </a:txBody>
                   <a:tcPr marL="10559" marR="10559" marT="5279" marB="5279" anchor="ctr">
@@ -7179,11 +6860,6 @@
                         </a:rPr>
                         <a:t>0 .94 </a:t>
                       </a:r>
-                      <a:endParaRPr lang="en-US" sz="3200" b="0">
-                        <a:effectLst/>
-                        <a:latin typeface="Arial" panose="020B0604020202090204" pitchFamily="34" charset="0"/>
-                        <a:cs typeface="Arial" panose="020B0604020202090204" pitchFamily="34" charset="0"/>
-                      </a:endParaRPr>
                     </a:p>
                     <a:p>
                       <a:pPr algn="ctr"/>
@@ -7195,11 +6871,6 @@
                         </a:rPr>
                         <a:t>(4.22)</a:t>
                       </a:r>
-                      <a:endParaRPr lang="en-US" sz="3200" b="0">
-                        <a:effectLst/>
-                        <a:latin typeface="Arial" panose="020B0604020202090204" pitchFamily="34" charset="0"/>
-                        <a:cs typeface="Arial" panose="020B0604020202090204" pitchFamily="34" charset="0"/>
-                      </a:endParaRPr>
                     </a:p>
                   </a:txBody>
                   <a:tcPr marL="10559" marR="10559" marT="10559" marB="10559" anchor="ctr">
@@ -7256,11 +6927,6 @@
                         </a:rPr>
                         <a:t>0.93 </a:t>
                       </a:r>
-                      <a:endParaRPr lang="en-US" sz="3200" b="0" dirty="0">
-                        <a:effectLst/>
-                        <a:latin typeface="Arial" panose="020B0604020202090204" pitchFamily="34" charset="0"/>
-                        <a:cs typeface="Arial" panose="020B0604020202090204" pitchFamily="34" charset="0"/>
-                      </a:endParaRPr>
                     </a:p>
                     <a:p>
                       <a:pPr algn="ctr"/>
@@ -7272,11 +6938,6 @@
                         </a:rPr>
                         <a:t>(4.09)</a:t>
                       </a:r>
-                      <a:endParaRPr lang="en-US" sz="3200" b="0" dirty="0">
-                        <a:effectLst/>
-                        <a:latin typeface="Arial" panose="020B0604020202090204" pitchFamily="34" charset="0"/>
-                        <a:cs typeface="Arial" panose="020B0604020202090204" pitchFamily="34" charset="0"/>
-                      </a:endParaRPr>
                     </a:p>
                   </a:txBody>
                   <a:tcPr marL="10559" marR="10559" marT="10559" marB="10559" anchor="ctr">
@@ -7333,11 +6994,6 @@
                         </a:rPr>
                         <a:t>0.33 </a:t>
                       </a:r>
-                      <a:endParaRPr lang="en-US" sz="3200" b="0" dirty="0">
-                        <a:effectLst/>
-                        <a:latin typeface="Arial" panose="020B0604020202090204" pitchFamily="34" charset="0"/>
-                        <a:cs typeface="Arial" panose="020B0604020202090204" pitchFamily="34" charset="0"/>
-                      </a:endParaRPr>
                     </a:p>
                     <a:p>
                       <a:pPr algn="ctr"/>
@@ -7349,11 +7005,6 @@
                         </a:rPr>
                         <a:t>(2.01)</a:t>
                       </a:r>
-                      <a:endParaRPr lang="en-US" sz="3200" b="0" dirty="0">
-                        <a:effectLst/>
-                        <a:latin typeface="Arial" panose="020B0604020202090204" pitchFamily="34" charset="0"/>
-                        <a:cs typeface="Arial" panose="020B0604020202090204" pitchFamily="34" charset="0"/>
-                      </a:endParaRPr>
                     </a:p>
                   </a:txBody>
                   <a:tcPr marL="10559" marR="10559" marT="10559" marB="10559" anchor="ctr">
@@ -7410,11 +7061,6 @@
                         </a:rPr>
                         <a:t>3.24 (</a:t>
                       </a:r>
-                      <a:endParaRPr lang="en-US" sz="3200" b="0">
-                        <a:effectLst/>
-                        <a:latin typeface="Arial" panose="020B0604020202090204" pitchFamily="34" charset="0"/>
-                        <a:cs typeface="Arial" panose="020B0604020202090204" pitchFamily="34" charset="0"/>
-                      </a:endParaRPr>
                     </a:p>
                     <a:p>
                       <a:pPr algn="ctr"/>
@@ -7426,11 +7072,6 @@
                         </a:rPr>
                         <a:t>8.62)</a:t>
                       </a:r>
-                      <a:endParaRPr lang="en-US" sz="3200" b="0">
-                        <a:effectLst/>
-                        <a:latin typeface="Arial" panose="020B0604020202090204" pitchFamily="34" charset="0"/>
-                        <a:cs typeface="Arial" panose="020B0604020202090204" pitchFamily="34" charset="0"/>
-                      </a:endParaRPr>
                     </a:p>
                   </a:txBody>
                   <a:tcPr marL="10559" marR="10559" marT="10559" marB="10559" anchor="ctr">
@@ -7473,6 +7114,11 @@
                     <a:noFill/>
                   </a:tcPr>
                 </a:tc>
+                <a:extLst>
+                  <a:ext uri="{0D108BD9-81ED-4DB2-BD59-A6C34878D82A}">
+                    <a16:rowId xmlns:a16="http://schemas.microsoft.com/office/drawing/2014/main" val="10007"/>
+                  </a:ext>
+                </a:extLst>
               </a:tr>
               <a:tr h="807085">
                 <a:tc>
@@ -7492,14 +7138,6 @@
                         </a:rPr>
                         <a:t>EHI Score</a:t>
                       </a:r>
-                      <a:endParaRPr lang="en-US" sz="3200" b="0" dirty="0">
-                        <a:solidFill>
-                          <a:srgbClr val="000000"/>
-                        </a:solidFill>
-                        <a:effectLst/>
-                        <a:latin typeface="Arial" panose="020B0604020202090204" pitchFamily="34" charset="0"/>
-                        <a:cs typeface="Arial" panose="020B0604020202090204" pitchFamily="34" charset="0"/>
-                      </a:endParaRPr>
                     </a:p>
                   </a:txBody>
                   <a:tcPr marL="10559" marR="10559" marT="5279" marB="5279" anchor="ctr">
@@ -7560,11 +7198,6 @@
                         </a:rPr>
                         <a:t>0.71 (0.46)</a:t>
                       </a:r>
-                      <a:endParaRPr lang="en-US" sz="3200" b="0">
-                        <a:effectLst/>
-                        <a:latin typeface="Arial" panose="020B0604020202090204" pitchFamily="34" charset="0"/>
-                        <a:cs typeface="Arial" panose="020B0604020202090204" pitchFamily="34" charset="0"/>
-                      </a:endParaRPr>
                     </a:p>
                   </a:txBody>
                   <a:tcPr marL="10559" marR="10559" marT="10559" marB="10559" anchor="ctr">
@@ -7621,11 +7254,6 @@
                         </a:rPr>
                         <a:t>0.72 (0.44)</a:t>
                       </a:r>
-                      <a:endParaRPr lang="en-US" sz="3200" b="0" dirty="0">
-                        <a:effectLst/>
-                        <a:latin typeface="Arial" panose="020B0604020202090204" pitchFamily="34" charset="0"/>
-                        <a:cs typeface="Arial" panose="020B0604020202090204" pitchFamily="34" charset="0"/>
-                      </a:endParaRPr>
                     </a:p>
                   </a:txBody>
                   <a:tcPr marL="10559" marR="10559" marT="10559" marB="10559" anchor="ctr">
@@ -7682,11 +7310,6 @@
                         </a:rPr>
                         <a:t>0.66 (0.56)</a:t>
                       </a:r>
-                      <a:endParaRPr lang="en-US" sz="3200" b="0" dirty="0">
-                        <a:effectLst/>
-                        <a:latin typeface="Arial" panose="020B0604020202090204" pitchFamily="34" charset="0"/>
-                        <a:cs typeface="Arial" panose="020B0604020202090204" pitchFamily="34" charset="0"/>
-                      </a:endParaRPr>
                     </a:p>
                   </a:txBody>
                   <a:tcPr marL="10559" marR="10559" marT="10559" marB="10559" anchor="ctr">
@@ -7743,11 +7366,6 @@
                         </a:rPr>
                         <a:t>0.72 (0.50)</a:t>
                       </a:r>
-                      <a:endParaRPr lang="en-US" sz="3200" b="0" dirty="0">
-                        <a:effectLst/>
-                        <a:latin typeface="Arial" panose="020B0604020202090204" pitchFamily="34" charset="0"/>
-                        <a:cs typeface="Arial" panose="020B0604020202090204" pitchFamily="34" charset="0"/>
-                      </a:endParaRPr>
                     </a:p>
                   </a:txBody>
                   <a:tcPr marL="10559" marR="10559" marT="10559" marB="10559" anchor="ctr">
@@ -7790,6 +7408,11 @@
                     <a:noFill/>
                   </a:tcPr>
                 </a:tc>
+                <a:extLst>
+                  <a:ext uri="{0D108BD9-81ED-4DB2-BD59-A6C34878D82A}">
+                    <a16:rowId xmlns:a16="http://schemas.microsoft.com/office/drawing/2014/main" val="10008"/>
+                  </a:ext>
+                </a:extLst>
               </a:tr>
               <a:tr h="1007110">
                 <a:tc>
@@ -7809,14 +7432,6 @@
                         </a:rPr>
                         <a:t>Loss of Smell</a:t>
                       </a:r>
-                      <a:endParaRPr lang="en-US" sz="3200" b="0" dirty="0">
-                        <a:solidFill>
-                          <a:srgbClr val="000000"/>
-                        </a:solidFill>
-                        <a:effectLst/>
-                        <a:latin typeface="Arial" panose="020B0604020202090204" pitchFamily="34" charset="0"/>
-                        <a:cs typeface="Arial" panose="020B0604020202090204" pitchFamily="34" charset="0"/>
-                      </a:endParaRPr>
                     </a:p>
                   </a:txBody>
                   <a:tcPr marL="10559" marR="10559" marT="5279" marB="5279" anchor="ctr">
@@ -7877,11 +7492,6 @@
                         </a:rPr>
                         <a:t>2537 (72.6%)</a:t>
                       </a:r>
-                      <a:endParaRPr lang="en-US" sz="3200" b="0" dirty="0">
-                        <a:effectLst/>
-                        <a:latin typeface="Arial" panose="020B0604020202090204" pitchFamily="34" charset="0"/>
-                        <a:cs typeface="Arial" panose="020B0604020202090204" pitchFamily="34" charset="0"/>
-                      </a:endParaRPr>
                     </a:p>
                   </a:txBody>
                   <a:tcPr marL="10559" marR="10559" marT="10559" marB="10559" anchor="ctr">
@@ -7938,11 +7548,6 @@
                         </a:rPr>
                         <a:t>2090 (73.3%)</a:t>
                       </a:r>
-                      <a:endParaRPr lang="en-US" sz="3200" b="0" dirty="0">
-                        <a:effectLst/>
-                        <a:latin typeface="Arial" panose="020B0604020202090204" pitchFamily="34" charset="0"/>
-                        <a:cs typeface="Arial" panose="020B0604020202090204" pitchFamily="34" charset="0"/>
-                      </a:endParaRPr>
                     </a:p>
                   </a:txBody>
                   <a:tcPr marL="10559" marR="10559" marT="10559" marB="10559" anchor="ctr">
@@ -7999,11 +7604,6 @@
                         </a:rPr>
                         <a:t>240 (58.5%)</a:t>
                       </a:r>
-                      <a:endParaRPr lang="en-US" sz="3200" b="0" dirty="0">
-                        <a:effectLst/>
-                        <a:latin typeface="Arial" panose="020B0604020202090204" pitchFamily="34" charset="0"/>
-                        <a:cs typeface="Arial" panose="020B0604020202090204" pitchFamily="34" charset="0"/>
-                      </a:endParaRPr>
                     </a:p>
                   </a:txBody>
                   <a:tcPr marL="10559" marR="10559" marT="10559" marB="10559" anchor="ctr">
@@ -8060,11 +7660,6 @@
                         </a:rPr>
                         <a:t>101 </a:t>
                       </a:r>
-                      <a:endParaRPr lang="en-US" sz="3200" b="0" dirty="0">
-                        <a:effectLst/>
-                        <a:latin typeface="Arial" panose="020B0604020202090204" pitchFamily="34" charset="0"/>
-                        <a:cs typeface="Arial" panose="020B0604020202090204" pitchFamily="34" charset="0"/>
-                      </a:endParaRPr>
                     </a:p>
                     <a:p>
                       <a:pPr algn="ctr"/>
@@ -8076,11 +7671,6 @@
                         </a:rPr>
                         <a:t>(59.1%)</a:t>
                       </a:r>
-                      <a:endParaRPr lang="en-US" sz="3200" b="0" dirty="0">
-                        <a:effectLst/>
-                        <a:latin typeface="Arial" panose="020B0604020202090204" pitchFamily="34" charset="0"/>
-                        <a:cs typeface="Arial" panose="020B0604020202090204" pitchFamily="34" charset="0"/>
-                      </a:endParaRPr>
                     </a:p>
                   </a:txBody>
                   <a:tcPr marL="10559" marR="10559" marT="10559" marB="10559" anchor="ctr">
@@ -8123,6 +7713,11 @@
                     <a:noFill/>
                   </a:tcPr>
                 </a:tc>
+                <a:extLst>
+                  <a:ext uri="{0D108BD9-81ED-4DB2-BD59-A6C34878D82A}">
+                    <a16:rowId xmlns:a16="http://schemas.microsoft.com/office/drawing/2014/main" val="10009"/>
+                  </a:ext>
+                </a:extLst>
               </a:tr>
               <a:tr h="793115">
                 <a:tc>
@@ -8142,14 +7737,6 @@
                         </a:rPr>
                         <a:t>Right Hand Dominant</a:t>
                       </a:r>
-                      <a:endParaRPr lang="en-US" sz="3200" b="0" dirty="0">
-                        <a:solidFill>
-                          <a:srgbClr val="000000"/>
-                        </a:solidFill>
-                        <a:effectLst/>
-                        <a:latin typeface="Arial" panose="020B0604020202090204" pitchFamily="34" charset="0"/>
-                        <a:cs typeface="Arial" panose="020B0604020202090204" pitchFamily="34" charset="0"/>
-                      </a:endParaRPr>
                     </a:p>
                   </a:txBody>
                   <a:tcPr marL="10559" marR="10559" marT="5279" marB="5279" anchor="ctr">
@@ -8210,11 +7797,6 @@
                         </a:rPr>
                         <a:t>1888 (53.3%)</a:t>
                       </a:r>
-                      <a:endParaRPr lang="en-US" sz="3200" b="0">
-                        <a:effectLst/>
-                        <a:latin typeface="Arial" panose="020B0604020202090204" pitchFamily="34" charset="0"/>
-                        <a:cs typeface="Arial" panose="020B0604020202090204" pitchFamily="34" charset="0"/>
-                      </a:endParaRPr>
                     </a:p>
                   </a:txBody>
                   <a:tcPr marL="10559" marR="10559" marT="10559" marB="10559" anchor="ctr">
@@ -8264,18 +7846,13 @@
                     <a:p>
                       <a:pPr algn="ctr"/>
                       <a:r>
-                        <a:rPr lang="en-US" sz="3200" b="0">
+                        <a:rPr lang="en-US" sz="3200" b="0" dirty="0">
                           <a:effectLst/>
                           <a:latin typeface="Arial" panose="020B0604020202090204" pitchFamily="34" charset="0"/>
                           <a:cs typeface="Arial" panose="020B0604020202090204" pitchFamily="34" charset="0"/>
                         </a:rPr>
                         <a:t>1765 (61.9%)</a:t>
                       </a:r>
-                      <a:endParaRPr lang="en-US" sz="3200" b="0">
-                        <a:effectLst/>
-                        <a:latin typeface="Arial" panose="020B0604020202090204" pitchFamily="34" charset="0"/>
-                        <a:cs typeface="Arial" panose="020B0604020202090204" pitchFamily="34" charset="0"/>
-                      </a:endParaRPr>
                     </a:p>
                   </a:txBody>
                   <a:tcPr marL="10559" marR="10559" marT="10559" marB="10559" anchor="ctr">
@@ -8332,11 +7909,6 @@
                         </a:rPr>
                         <a:t>20 </a:t>
                       </a:r>
-                      <a:endParaRPr lang="en-US" sz="3200" b="0">
-                        <a:effectLst/>
-                        <a:latin typeface="Arial" panose="020B0604020202090204" pitchFamily="34" charset="0"/>
-                        <a:cs typeface="Arial" panose="020B0604020202090204" pitchFamily="34" charset="0"/>
-                      </a:endParaRPr>
                     </a:p>
                     <a:p>
                       <a:pPr algn="ctr"/>
@@ -8348,11 +7920,6 @@
                         </a:rPr>
                         <a:t>(4.9%)</a:t>
                       </a:r>
-                      <a:endParaRPr lang="en-US" sz="3200" b="0">
-                        <a:effectLst/>
-                        <a:latin typeface="Arial" panose="020B0604020202090204" pitchFamily="34" charset="0"/>
-                        <a:cs typeface="Arial" panose="020B0604020202090204" pitchFamily="34" charset="0"/>
-                      </a:endParaRPr>
                     </a:p>
                   </a:txBody>
                   <a:tcPr marL="10559" marR="10559" marT="10559" marB="10559" anchor="ctr">
@@ -8409,11 +7976,6 @@
                         </a:rPr>
                         <a:t>102 </a:t>
                       </a:r>
-                      <a:endParaRPr lang="en-US" sz="3200" b="0" dirty="0">
-                        <a:effectLst/>
-                        <a:latin typeface="Arial" panose="020B0604020202090204" pitchFamily="34" charset="0"/>
-                        <a:cs typeface="Arial" panose="020B0604020202090204" pitchFamily="34" charset="0"/>
-                      </a:endParaRPr>
                     </a:p>
                     <a:p>
                       <a:pPr algn="ctr"/>
@@ -8425,11 +7987,6 @@
                         </a:rPr>
                         <a:t>(59.6%)</a:t>
                       </a:r>
-                      <a:endParaRPr lang="en-US" sz="3200" b="0" dirty="0">
-                        <a:effectLst/>
-                        <a:latin typeface="Arial" panose="020B0604020202090204" pitchFamily="34" charset="0"/>
-                        <a:cs typeface="Arial" panose="020B0604020202090204" pitchFamily="34" charset="0"/>
-                      </a:endParaRPr>
                     </a:p>
                   </a:txBody>
                   <a:tcPr marL="10559" marR="10559" marT="10559" marB="10559" anchor="ctr">
@@ -8472,6 +8029,11 @@
                     <a:noFill/>
                   </a:tcPr>
                 </a:tc>
+                <a:extLst>
+                  <a:ext uri="{0D108BD9-81ED-4DB2-BD59-A6C34878D82A}">
+                    <a16:rowId xmlns:a16="http://schemas.microsoft.com/office/drawing/2014/main" val="10010"/>
+                  </a:ext>
+                </a:extLst>
               </a:tr>
               <a:tr h="589915">
                 <a:tc>
@@ -8491,14 +8053,6 @@
                         </a:rPr>
                         <a:t>Regular Exercise</a:t>
                       </a:r>
-                      <a:endParaRPr lang="en-US" sz="3200" b="0" dirty="0">
-                        <a:solidFill>
-                          <a:srgbClr val="000000"/>
-                        </a:solidFill>
-                        <a:effectLst/>
-                        <a:latin typeface="Arial" panose="020B0604020202090204" pitchFamily="34" charset="0"/>
-                        <a:cs typeface="Arial" panose="020B0604020202090204" pitchFamily="34" charset="0"/>
-                      </a:endParaRPr>
                     </a:p>
                   </a:txBody>
                   <a:tcPr marL="10559" marR="10559" marT="5279" marB="5279" anchor="ctr">
@@ -8559,11 +8113,6 @@
                         </a:rPr>
                         <a:t>1795 (50.7%)</a:t>
                       </a:r>
-                      <a:endParaRPr lang="en-US" sz="3200" b="0" dirty="0">
-                        <a:effectLst/>
-                        <a:latin typeface="Arial" panose="020B0604020202090204" pitchFamily="34" charset="0"/>
-                        <a:cs typeface="Arial" panose="020B0604020202090204" pitchFamily="34" charset="0"/>
-                      </a:endParaRPr>
                     </a:p>
                   </a:txBody>
                   <a:tcPr marL="10559" marR="10559" marT="10559" marB="10559" anchor="ctr">
@@ -8620,11 +8169,6 @@
                         </a:rPr>
                         <a:t>1555 (54.5%)</a:t>
                       </a:r>
-                      <a:endParaRPr lang="en-US" sz="3200" b="0" dirty="0">
-                        <a:effectLst/>
-                        <a:latin typeface="Arial" panose="020B0604020202090204" pitchFamily="34" charset="0"/>
-                        <a:cs typeface="Arial" panose="020B0604020202090204" pitchFamily="34" charset="0"/>
-                      </a:endParaRPr>
                     </a:p>
                   </a:txBody>
                   <a:tcPr marL="10559" marR="10559" marT="10559" marB="10559" anchor="ctr">
@@ -8681,11 +8225,6 @@
                         </a:rPr>
                         <a:t>162 </a:t>
                       </a:r>
-                      <a:endParaRPr lang="en-US" sz="3200" b="0" dirty="0">
-                        <a:effectLst/>
-                        <a:latin typeface="Arial" panose="020B0604020202090204" pitchFamily="34" charset="0"/>
-                        <a:cs typeface="Arial" panose="020B0604020202090204" pitchFamily="34" charset="0"/>
-                      </a:endParaRPr>
                     </a:p>
                     <a:p>
                       <a:pPr algn="ctr"/>
@@ -8697,11 +8236,6 @@
                         </a:rPr>
                         <a:t>(39.5%)</a:t>
                       </a:r>
-                      <a:endParaRPr lang="en-US" sz="3200" b="0" dirty="0">
-                        <a:effectLst/>
-                        <a:latin typeface="Arial" panose="020B0604020202090204" pitchFamily="34" charset="0"/>
-                        <a:cs typeface="Arial" panose="020B0604020202090204" pitchFamily="34" charset="0"/>
-                      </a:endParaRPr>
                     </a:p>
                   </a:txBody>
                   <a:tcPr marL="10559" marR="10559" marT="10559" marB="10559" anchor="ctr">
@@ -8758,11 +8292,6 @@
                         </a:rPr>
                         <a:t>72 </a:t>
                       </a:r>
-                      <a:endParaRPr lang="en-US" sz="3200" b="0" dirty="0">
-                        <a:effectLst/>
-                        <a:latin typeface="Arial" panose="020B0604020202090204" pitchFamily="34" charset="0"/>
-                        <a:cs typeface="Arial" panose="020B0604020202090204" pitchFamily="34" charset="0"/>
-                      </a:endParaRPr>
                     </a:p>
                     <a:p>
                       <a:pPr algn="ctr"/>
@@ -8774,11 +8303,6 @@
                         </a:rPr>
                         <a:t>42.1%)</a:t>
                       </a:r>
-                      <a:endParaRPr lang="en-US" sz="3200" b="0" dirty="0">
-                        <a:effectLst/>
-                        <a:latin typeface="Arial" panose="020B0604020202090204" pitchFamily="34" charset="0"/>
-                        <a:cs typeface="Arial" panose="020B0604020202090204" pitchFamily="34" charset="0"/>
-                      </a:endParaRPr>
                     </a:p>
                   </a:txBody>
                   <a:tcPr marL="10559" marR="10559" marT="10559" marB="10559" anchor="ctr">
@@ -8821,6 +8345,11 @@
                     <a:noFill/>
                   </a:tcPr>
                 </a:tc>
+                <a:extLst>
+                  <a:ext uri="{0D108BD9-81ED-4DB2-BD59-A6C34878D82A}">
+                    <a16:rowId xmlns:a16="http://schemas.microsoft.com/office/drawing/2014/main" val="10011"/>
+                  </a:ext>
+                </a:extLst>
               </a:tr>
               <a:tr h="955675">
                 <a:tc>
@@ -8840,14 +8369,6 @@
                         </a:rPr>
                         <a:t>Coffee Drinker</a:t>
                       </a:r>
-                      <a:endParaRPr lang="en-US" sz="3200" b="0" dirty="0">
-                        <a:solidFill>
-                          <a:srgbClr val="000000"/>
-                        </a:solidFill>
-                        <a:effectLst/>
-                        <a:latin typeface="Arial" panose="020B0604020202090204" pitchFamily="34" charset="0"/>
-                        <a:cs typeface="Arial" panose="020B0604020202090204" pitchFamily="34" charset="0"/>
-                      </a:endParaRPr>
                     </a:p>
                   </a:txBody>
                   <a:tcPr marL="10559" marR="10559" marT="5279" marB="5279" anchor="ctr">
@@ -8908,11 +8429,6 @@
                         </a:rPr>
                         <a:t>1735 (49.0%)</a:t>
                       </a:r>
-                      <a:endParaRPr lang="en-US" sz="3200" b="0">
-                        <a:effectLst/>
-                        <a:latin typeface="Arial" panose="020B0604020202090204" pitchFamily="34" charset="0"/>
-                        <a:cs typeface="Arial" panose="020B0604020202090204" pitchFamily="34" charset="0"/>
-                      </a:endParaRPr>
                     </a:p>
                   </a:txBody>
                   <a:tcPr marL="10559" marR="10559" marT="10559" marB="10559" anchor="ctr">
@@ -8969,11 +8485,6 @@
                         </a:rPr>
                         <a:t>1480 (51.9%)</a:t>
                       </a:r>
-                      <a:endParaRPr lang="en-US" sz="3200" b="0">
-                        <a:effectLst/>
-                        <a:latin typeface="Arial" panose="020B0604020202090204" pitchFamily="34" charset="0"/>
-                        <a:cs typeface="Arial" panose="020B0604020202090204" pitchFamily="34" charset="0"/>
-                      </a:endParaRPr>
                     </a:p>
                   </a:txBody>
                   <a:tcPr marL="10559" marR="10559" marT="10559" marB="10559" anchor="ctr">
@@ -9030,11 +8541,6 @@
                         </a:rPr>
                         <a:t>160 </a:t>
                       </a:r>
-                      <a:endParaRPr lang="en-US" sz="3200" b="0">
-                        <a:effectLst/>
-                        <a:latin typeface="Arial" panose="020B0604020202090204" pitchFamily="34" charset="0"/>
-                        <a:cs typeface="Arial" panose="020B0604020202090204" pitchFamily="34" charset="0"/>
-                      </a:endParaRPr>
                     </a:p>
                     <a:p>
                       <a:pPr algn="ctr"/>
@@ -9046,11 +8552,6 @@
                         </a:rPr>
                         <a:t>(39.0%)</a:t>
                       </a:r>
-                      <a:endParaRPr lang="en-US" sz="3200" b="0">
-                        <a:effectLst/>
-                        <a:latin typeface="Arial" panose="020B0604020202090204" pitchFamily="34" charset="0"/>
-                        <a:cs typeface="Arial" panose="020B0604020202090204" pitchFamily="34" charset="0"/>
-                      </a:endParaRPr>
                     </a:p>
                   </a:txBody>
                   <a:tcPr marL="10559" marR="10559" marT="10559" marB="10559" anchor="ctr">
@@ -9107,11 +8608,6 @@
                         </a:rPr>
                         <a:t>90 </a:t>
                       </a:r>
-                      <a:endParaRPr lang="en-US" sz="3200" b="0" dirty="0">
-                        <a:effectLst/>
-                        <a:latin typeface="Arial" panose="020B0604020202090204" pitchFamily="34" charset="0"/>
-                        <a:cs typeface="Arial" panose="020B0604020202090204" pitchFamily="34" charset="0"/>
-                      </a:endParaRPr>
                     </a:p>
                     <a:p>
                       <a:pPr algn="ctr"/>
@@ -9123,11 +8619,6 @@
                         </a:rPr>
                         <a:t>(52.6%)</a:t>
                       </a:r>
-                      <a:endParaRPr lang="en-US" sz="3200" b="0" dirty="0">
-                        <a:effectLst/>
-                        <a:latin typeface="Arial" panose="020B0604020202090204" pitchFamily="34" charset="0"/>
-                        <a:cs typeface="Arial" panose="020B0604020202090204" pitchFamily="34" charset="0"/>
-                      </a:endParaRPr>
                     </a:p>
                   </a:txBody>
                   <a:tcPr marL="10559" marR="10559" marT="10559" marB="10559" anchor="ctr">
@@ -9170,6 +8661,11 @@
                     <a:noFill/>
                   </a:tcPr>
                 </a:tc>
+                <a:extLst>
+                  <a:ext uri="{0D108BD9-81ED-4DB2-BD59-A6C34878D82A}">
+                    <a16:rowId xmlns:a16="http://schemas.microsoft.com/office/drawing/2014/main" val="10012"/>
+                  </a:ext>
+                </a:extLst>
               </a:tr>
             </a:tbl>
           </a:graphicData>
@@ -9279,8 +8775,8 @@
         </p:nvSpPr>
         <p:spPr>
           <a:xfrm>
-            <a:off x="133159" y="13630767"/>
-            <a:ext cx="8443444" cy="3397250"/>
+            <a:off x="133159" y="13806612"/>
+            <a:ext cx="8443444" cy="2439129"/>
           </a:xfrm>
           <a:prstGeom prst="rect">
             <a:avLst/>
@@ -9313,42 +8809,6 @@
               </a:rPr>
               <a:t>Evaluate and compare the efficacy of various models in differentiating PD, PD-Plus, and neurologically healthy controls.</a:t>
             </a:r>
-            <a:endParaRPr lang="en-US" altLang="zh-CN" sz="3000" spc="-20" dirty="0">
-              <a:solidFill>
-                <a:schemeClr val="tx1"/>
-              </a:solidFill>
-              <a:latin typeface="Times New Roman" panose="02020503050405090304" charset="0"/>
-              <a:cs typeface="Times New Roman" panose="02020503050405090304" charset="0"/>
-            </a:endParaRPr>
-          </a:p>
-          <a:p>
-            <a:pPr marL="527050" marR="102235" indent="-514350">
-              <a:lnSpc>
-                <a:spcPct val="100000"/>
-              </a:lnSpc>
-              <a:spcBef>
-                <a:spcPts val="290"/>
-              </a:spcBef>
-              <a:buFont typeface="+mj-lt"/>
-              <a:buAutoNum type="arabicPeriod"/>
-            </a:pPr>
-            <a:r>
-              <a:rPr lang="en-US" altLang="zh-CN" sz="3000" spc="-20" dirty="0">
-                <a:solidFill>
-                  <a:schemeClr val="tx1"/>
-                </a:solidFill>
-                <a:latin typeface="Times New Roman" panose="02020503050405090304" charset="0"/>
-                <a:cs typeface="Times New Roman" panose="02020503050405090304" charset="0"/>
-              </a:rPr>
-              <a:t>Apply threshold optimization to improve classification of the minority class (PD-plus).</a:t>
-            </a:r>
-            <a:endParaRPr lang="en-US" altLang="zh-CN" sz="3000" spc="-20" dirty="0">
-              <a:solidFill>
-                <a:schemeClr val="tx1"/>
-              </a:solidFill>
-              <a:latin typeface="Times New Roman" panose="02020503050405090304" charset="0"/>
-              <a:cs typeface="Times New Roman" panose="02020503050405090304" charset="0"/>
-            </a:endParaRPr>
           </a:p>
           <a:p>
             <a:pPr marL="527050" marR="102235" indent="-514350">
@@ -9398,25 +8858,15 @@
           <a:bodyPr wrap="square" rtlCol="0">
             <a:noAutofit/>
           </a:bodyPr>
-          <a:p>
-            <a:r>
-              <a:rPr lang="en-US" altLang="zh-CN" sz="3200">
+          <a:lstStyle/>
+          <a:p>
+            <a:r>
+              <a:rPr lang="en-US" altLang="zh-CN" sz="3200" dirty="0">
                 <a:latin typeface="Times New Roman" panose="02020503050405090304" charset="0"/>
                 <a:cs typeface="Times New Roman" panose="02020503050405090304" charset="0"/>
               </a:rPr>
-              <a:t>Parkinson's disease (PD) and atypical parkinsonism (PD-plus) are clinically difficult to distinguish. Using C-OPN data (n = 3,433), we developed and compared six classification models </a:t>
-            </a:r>
-            <a:r>
-              <a:rPr lang="en-US" altLang="zh-CN" sz="3200">
-                <a:latin typeface="Times New Roman" panose="02020503050405090304" charset="0"/>
-                <a:cs typeface="Times New Roman" panose="02020503050405090304" charset="0"/>
-              </a:rPr>
-              <a:t>which includes a Tabular Transformer and five traditional machine learning models. We use them  to differentiate PD, PD-plus and healthy controls using clinical and neuropsychological features.</a:t>
-            </a:r>
-            <a:endParaRPr lang="en-US" altLang="zh-CN" sz="3200">
-              <a:latin typeface="Times New Roman" panose="02020503050405090304" charset="0"/>
-              <a:cs typeface="Times New Roman" panose="02020503050405090304" charset="0"/>
-            </a:endParaRPr>
+              <a:t>Parkinson's disease (PD) and atypical parkinsonism (PD-plus) are clinically difficult to distinguish. Using C-OPN data (n = 3,433), we developed and compared six classification models which includes a Tabular Transformer and five traditional machine learning models. We use them  to differentiate PD, PD-plus and healthy controls using clinical and neuropsychological features.</a:t>
+            </a:r>
           </a:p>
         </p:txBody>
       </p:sp>
@@ -9440,6 +8890,7 @@
           <a:bodyPr wrap="square" rtlCol="0">
             <a:spAutoFit/>
           </a:bodyPr>
+          <a:lstStyle/>
           <a:p>
             <a:pPr marL="285750" indent="-285750">
               <a:buFont typeface="Arial" panose="020B0604020202090204" pitchFamily="34" charset="0"/>
@@ -9452,10 +8903,6 @@
               </a:rPr>
               <a:t>PD is the 2nd most common neurodegenerative disorder, affecting 110,000+ Canadians.</a:t>
             </a:r>
-            <a:endParaRPr lang="en-US" altLang="zh-CN" sz="3000">
-              <a:latin typeface="Times New Roman" panose="02020503050405090304" charset="0"/>
-              <a:cs typeface="Times New Roman" panose="02020503050405090304" charset="0"/>
-            </a:endParaRPr>
           </a:p>
           <a:p>
             <a:pPr marL="285750" indent="-285750">
@@ -9469,10 +8916,6 @@
               </a:rPr>
               <a:t>PD-PLus (PSP,MSA, CSB, DLB) shares motor features with PD but progresses faster and responds poorly to levodopa</a:t>
             </a:r>
-            <a:endParaRPr lang="en-US" altLang="zh-CN" sz="3000">
-              <a:latin typeface="Times New Roman" panose="02020503050405090304" charset="0"/>
-              <a:cs typeface="Times New Roman" panose="02020503050405090304" charset="0"/>
-            </a:endParaRPr>
           </a:p>
           <a:p>
             <a:pPr marL="285750" indent="-285750">
@@ -9486,10 +8929,6 @@
               </a:rPr>
               <a:t>No Reliable Clinical tool existes to distinguish PD and PD-Plus at scale. </a:t>
             </a:r>
-            <a:endParaRPr lang="en-US" altLang="zh-CN" sz="3000">
-              <a:latin typeface="Times New Roman" panose="02020503050405090304" charset="0"/>
-              <a:cs typeface="Times New Roman" panose="02020503050405090304" charset="0"/>
-            </a:endParaRPr>
           </a:p>
         </p:txBody>
       </p:sp>
@@ -9497,7 +8936,13 @@
         <p:nvGraphicFramePr>
           <p:cNvPr id="13" name="表格 12"/>
           <p:cNvGraphicFramePr/>
-          <p:nvPr/>
+          <p:nvPr>
+            <p:extLst>
+              <p:ext uri="{D42A27DB-BD31-4B8C-83A1-F6EECF244321}">
+                <p14:modId xmlns:p14="http://schemas.microsoft.com/office/powerpoint/2010/main" val="120457783"/>
+              </p:ext>
+            </p:extLst>
+          </p:nvPr>
         </p:nvGraphicFramePr>
         <p:xfrm>
           <a:off x="8542655" y="18618835"/>
@@ -9510,18 +8955,61 @@
                 <a:tableStyleId>{9D7B26C5-4107-4FEC-AEDC-1716B250A1EF}</a:tableStyleId>
               </a:tblPr>
               <a:tblGrid>
-                <a:gridCol w="2569845"/>
-                <a:gridCol w="1876425"/>
-                <a:gridCol w="1452880"/>
-                <a:gridCol w="1306195"/>
-                <a:gridCol w="1925955"/>
-                <a:gridCol w="1336040"/>
-                <a:gridCol w="1701800"/>
+                <a:gridCol w="2569845">
+                  <a:extLst>
+                    <a:ext uri="{9D8B030D-6E8A-4147-A177-3AD203B41FA5}">
+                      <a16:colId xmlns:a16="http://schemas.microsoft.com/office/drawing/2014/main" val="20000"/>
+                    </a:ext>
+                  </a:extLst>
+                </a:gridCol>
+                <a:gridCol w="1876425">
+                  <a:extLst>
+                    <a:ext uri="{9D8B030D-6E8A-4147-A177-3AD203B41FA5}">
+                      <a16:colId xmlns:a16="http://schemas.microsoft.com/office/drawing/2014/main" val="20001"/>
+                    </a:ext>
+                  </a:extLst>
+                </a:gridCol>
+                <a:gridCol w="1452880">
+                  <a:extLst>
+                    <a:ext uri="{9D8B030D-6E8A-4147-A177-3AD203B41FA5}">
+                      <a16:colId xmlns:a16="http://schemas.microsoft.com/office/drawing/2014/main" val="20002"/>
+                    </a:ext>
+                  </a:extLst>
+                </a:gridCol>
+                <a:gridCol w="1306195">
+                  <a:extLst>
+                    <a:ext uri="{9D8B030D-6E8A-4147-A177-3AD203B41FA5}">
+                      <a16:colId xmlns:a16="http://schemas.microsoft.com/office/drawing/2014/main" val="20003"/>
+                    </a:ext>
+                  </a:extLst>
+                </a:gridCol>
+                <a:gridCol w="1925955">
+                  <a:extLst>
+                    <a:ext uri="{9D8B030D-6E8A-4147-A177-3AD203B41FA5}">
+                      <a16:colId xmlns:a16="http://schemas.microsoft.com/office/drawing/2014/main" val="20004"/>
+                    </a:ext>
+                  </a:extLst>
+                </a:gridCol>
+                <a:gridCol w="1336040">
+                  <a:extLst>
+                    <a:ext uri="{9D8B030D-6E8A-4147-A177-3AD203B41FA5}">
+                      <a16:colId xmlns:a16="http://schemas.microsoft.com/office/drawing/2014/main" val="20005"/>
+                    </a:ext>
+                  </a:extLst>
+                </a:gridCol>
+                <a:gridCol w="1701800">
+                  <a:extLst>
+                    <a:ext uri="{9D8B030D-6E8A-4147-A177-3AD203B41FA5}">
+                      <a16:colId xmlns:a16="http://schemas.microsoft.com/office/drawing/2014/main" val="20006"/>
+                    </a:ext>
+                  </a:extLst>
+                </a:gridCol>
               </a:tblGrid>
               <a:tr h="234950">
                 <a:tc>
                   <a:txBody>
                     <a:bodyPr/>
+                    <a:lstStyle/>
                     <a:p>
                       <a:pPr algn="ctr">
                         <a:buNone/>
@@ -9530,7 +9018,6 @@
                         <a:rPr lang="en-US" altLang="zh-CN" sz="2800"/>
                         <a:t> Model</a:t>
                       </a:r>
-                      <a:endParaRPr lang="en-US" altLang="zh-CN" sz="2800"/>
                     </a:p>
                   </a:txBody>
                   <a:tcPr/>
@@ -9538,15 +9025,15 @@
                 <a:tc>
                   <a:txBody>
                     <a:bodyPr/>
+                    <a:lstStyle/>
                     <a:p>
                       <a:pPr algn="ctr">
                         <a:buNone/>
                       </a:pPr>
                       <a:r>
-                        <a:rPr lang="en-US" altLang="zh-CN" sz="2800"/>
+                        <a:rPr lang="en-US" altLang="zh-CN" sz="2800" dirty="0"/>
                         <a:t>Accuracy</a:t>
                       </a:r>
-                      <a:endParaRPr lang="en-US" altLang="zh-CN" sz="2800"/>
                     </a:p>
                   </a:txBody>
                   <a:tcPr/>
@@ -9554,6 +9041,7 @@
                 <a:tc>
                   <a:txBody>
                     <a:bodyPr/>
+                    <a:lstStyle/>
                     <a:p>
                       <a:pPr algn="ctr">
                         <a:buNone/>
@@ -9562,7 +9050,6 @@
                         <a:rPr lang="en-US" altLang="zh-CN" sz="2800"/>
                         <a:t>AUC</a:t>
                       </a:r>
-                      <a:endParaRPr lang="en-US" altLang="zh-CN" sz="2800"/>
                     </a:p>
                   </a:txBody>
                   <a:tcPr/>
@@ -9570,6 +9057,7 @@
                 <a:tc>
                   <a:txBody>
                     <a:bodyPr/>
+                    <a:lstStyle/>
                     <a:p>
                       <a:pPr algn="ctr">
                         <a:buNone/>
@@ -9578,7 +9066,6 @@
                         <a:rPr lang="en-US" altLang="zh-CN" sz="2800"/>
                         <a:t>F1</a:t>
                       </a:r>
-                      <a:endParaRPr lang="en-US" altLang="zh-CN" sz="2800"/>
                     </a:p>
                   </a:txBody>
                   <a:tcPr/>
@@ -9586,6 +9073,7 @@
                 <a:tc>
                   <a:txBody>
                     <a:bodyPr/>
+                    <a:lstStyle/>
                     <a:p>
                       <a:pPr algn="ctr">
                         <a:buNone/>
@@ -9594,7 +9082,6 @@
                         <a:rPr lang="en-US" altLang="zh-CN" sz="2800"/>
                         <a:t>Precision</a:t>
                       </a:r>
-                      <a:endParaRPr lang="en-US" altLang="zh-CN" sz="2800"/>
                     </a:p>
                   </a:txBody>
                   <a:tcPr/>
@@ -9602,6 +9089,7 @@
                 <a:tc>
                   <a:txBody>
                     <a:bodyPr/>
+                    <a:lstStyle/>
                     <a:p>
                       <a:pPr algn="ctr">
                         <a:buNone/>
@@ -9610,7 +9098,6 @@
                         <a:rPr lang="en-US" altLang="zh-CN" sz="2800"/>
                         <a:t>Recall</a:t>
                       </a:r>
-                      <a:endParaRPr lang="en-US" altLang="zh-CN" sz="2800"/>
                     </a:p>
                   </a:txBody>
                   <a:tcPr/>
@@ -9618,6 +9105,7 @@
                 <a:tc>
                   <a:txBody>
                     <a:bodyPr/>
+                    <a:lstStyle/>
                     <a:p>
                       <a:pPr algn="ctr">
                         <a:buNone/>
@@ -9626,16 +9114,21 @@
                         <a:rPr lang="en-US" altLang="zh-CN" sz="2800"/>
                         <a:t>Kappa</a:t>
                       </a:r>
-                      <a:endParaRPr lang="en-US" altLang="zh-CN" sz="2800"/>
                     </a:p>
                   </a:txBody>
                   <a:tcPr/>
                 </a:tc>
+                <a:extLst>
+                  <a:ext uri="{0D108BD9-81ED-4DB2-BD59-A6C34878D82A}">
+                    <a16:rowId xmlns:a16="http://schemas.microsoft.com/office/drawing/2014/main" val="10000"/>
+                  </a:ext>
+                </a:extLst>
               </a:tr>
               <a:tr h="500380">
                 <a:tc>
                   <a:txBody>
                     <a:bodyPr/>
+                    <a:lstStyle/>
                     <a:p>
                       <a:pPr algn="ctr">
                         <a:buNone/>
@@ -9644,7 +9137,6 @@
                         <a:rPr lang="en-US" altLang="zh-CN" sz="3400"/>
                         <a:t>Tabular</a:t>
                       </a:r>
-                      <a:endParaRPr lang="en-US" altLang="zh-CN" sz="3400"/>
                     </a:p>
                     <a:p>
                       <a:pPr algn="ctr">
@@ -9654,7 +9146,6 @@
                         <a:rPr lang="en-US" altLang="zh-CN" sz="3400"/>
                         <a:t>Transformer</a:t>
                       </a:r>
-                      <a:endParaRPr lang="en-US" altLang="zh-CN" sz="3400"/>
                     </a:p>
                   </a:txBody>
                   <a:tcPr/>
@@ -9662,15 +9153,15 @@
                 <a:tc>
                   <a:txBody>
                     <a:bodyPr/>
+                    <a:lstStyle/>
                     <a:p>
                       <a:pPr algn="ctr">
                         <a:buNone/>
                       </a:pPr>
                       <a:r>
-                        <a:rPr lang="en-US" altLang="zh-CN" sz="3400"/>
+                        <a:rPr lang="en-US" altLang="zh-CN" sz="3400" b="1" dirty="0"/>
                         <a:t>0.923</a:t>
                       </a:r>
-                      <a:endParaRPr lang="en-US" altLang="zh-CN" sz="3400"/>
                     </a:p>
                   </a:txBody>
                   <a:tcPr/>
@@ -9678,15 +9169,15 @@
                 <a:tc>
                   <a:txBody>
                     <a:bodyPr/>
+                    <a:lstStyle/>
                     <a:p>
                       <a:pPr algn="ctr">
                         <a:buNone/>
                       </a:pPr>
                       <a:r>
-                        <a:rPr lang="en-US" altLang="zh-CN" sz="3400"/>
+                        <a:rPr lang="en-US" altLang="zh-CN" sz="3400" dirty="0"/>
                         <a:t>0.957</a:t>
                       </a:r>
-                      <a:endParaRPr lang="en-US" altLang="zh-CN" sz="3400"/>
                     </a:p>
                   </a:txBody>
                   <a:tcPr/>
@@ -9694,15 +9185,15 @@
                 <a:tc>
                   <a:txBody>
                     <a:bodyPr/>
+                    <a:lstStyle/>
                     <a:p>
                       <a:pPr algn="ctr">
                         <a:buNone/>
                       </a:pPr>
                       <a:r>
-                        <a:rPr lang="en-US" altLang="zh-CN" sz="3400"/>
+                        <a:rPr lang="en-US" altLang="zh-CN" sz="3400" b="1" dirty="0"/>
                         <a:t>0.829</a:t>
                       </a:r>
-                      <a:endParaRPr lang="en-US" altLang="zh-CN" sz="3400"/>
                     </a:p>
                   </a:txBody>
                   <a:tcPr/>
@@ -9710,6 +9201,7 @@
                 <a:tc>
                   <a:txBody>
                     <a:bodyPr/>
+                    <a:lstStyle/>
                     <a:p>
                       <a:pPr algn="ctr">
                         <a:buNone/>
@@ -9718,7 +9210,6 @@
                         <a:rPr lang="en-US" altLang="zh-CN" sz="3400"/>
                         <a:t>0.875</a:t>
                       </a:r>
-                      <a:endParaRPr lang="en-US" altLang="zh-CN" sz="3400"/>
                     </a:p>
                   </a:txBody>
                   <a:tcPr/>
@@ -9726,15 +9217,15 @@
                 <a:tc>
                   <a:txBody>
                     <a:bodyPr/>
+                    <a:lstStyle/>
                     <a:p>
                       <a:pPr algn="ctr">
                         <a:buNone/>
                       </a:pPr>
                       <a:r>
-                        <a:rPr lang="en-US" altLang="zh-CN" sz="3400"/>
+                        <a:rPr lang="en-US" altLang="zh-CN" sz="3400" b="1" dirty="0"/>
                         <a:t>0.795</a:t>
                       </a:r>
-                      <a:endParaRPr lang="en-US" altLang="zh-CN" sz="3400"/>
                     </a:p>
                   </a:txBody>
                   <a:tcPr/>
@@ -9742,24 +9233,30 @@
                 <a:tc>
                   <a:txBody>
                     <a:bodyPr/>
+                    <a:lstStyle/>
                     <a:p>
                       <a:pPr algn="ctr">
                         <a:buNone/>
                       </a:pPr>
                       <a:r>
-                        <a:rPr lang="en-US" altLang="zh-CN" sz="3400"/>
+                        <a:rPr lang="en-US" altLang="zh-CN" sz="3400" b="1" dirty="0"/>
                         <a:t>0.710</a:t>
                       </a:r>
-                      <a:endParaRPr lang="en-US" altLang="zh-CN" sz="3400"/>
                     </a:p>
                   </a:txBody>
                   <a:tcPr/>
                 </a:tc>
+                <a:extLst>
+                  <a:ext uri="{0D108BD9-81ED-4DB2-BD59-A6C34878D82A}">
+                    <a16:rowId xmlns:a16="http://schemas.microsoft.com/office/drawing/2014/main" val="10001"/>
+                  </a:ext>
+                </a:extLst>
               </a:tr>
               <a:tr h="880110">
                 <a:tc>
                   <a:txBody>
                     <a:bodyPr/>
+                    <a:lstStyle/>
                     <a:p>
                       <a:pPr algn="ctr">
                         <a:buNone/>
@@ -9768,7 +9265,6 @@
                         <a:rPr lang="en-US" altLang="zh-CN" sz="3400"/>
                         <a:t>Logistic </a:t>
                       </a:r>
-                      <a:endParaRPr lang="en-US" altLang="zh-CN" sz="3400"/>
                     </a:p>
                     <a:p>
                       <a:pPr algn="ctr">
@@ -9778,7 +9274,6 @@
                         <a:rPr lang="en-US" altLang="zh-CN" sz="3400"/>
                         <a:t>Regression</a:t>
                       </a:r>
-                      <a:endParaRPr lang="en-US" altLang="zh-CN" sz="3400"/>
                     </a:p>
                   </a:txBody>
                   <a:tcPr/>
@@ -9786,6 +9281,7 @@
                 <a:tc>
                   <a:txBody>
                     <a:bodyPr/>
+                    <a:lstStyle/>
                     <a:p>
                       <a:pPr algn="ctr">
                         <a:buNone/>
@@ -9794,7 +9290,6 @@
                         <a:rPr lang="en-US" altLang="zh-CN" sz="3400"/>
                         <a:t>0.905</a:t>
                       </a:r>
-                      <a:endParaRPr lang="en-US" altLang="zh-CN" sz="3400"/>
                     </a:p>
                   </a:txBody>
                   <a:tcPr/>
@@ -9802,6 +9297,7 @@
                 <a:tc>
                   <a:txBody>
                     <a:bodyPr/>
+                    <a:lstStyle/>
                     <a:p>
                       <a:pPr algn="ctr">
                         <a:buNone/>
@@ -9810,7 +9306,6 @@
                         <a:rPr lang="en-US" altLang="zh-CN" sz="3400"/>
                         <a:t>0.936</a:t>
                       </a:r>
-                      <a:endParaRPr lang="en-US" altLang="zh-CN" sz="3400"/>
                     </a:p>
                   </a:txBody>
                   <a:tcPr/>
@@ -9818,6 +9313,7 @@
                 <a:tc>
                   <a:txBody>
                     <a:bodyPr/>
+                    <a:lstStyle/>
                     <a:p>
                       <a:pPr algn="ctr">
                         <a:buNone/>
@@ -9826,7 +9322,6 @@
                         <a:rPr lang="en-US" altLang="zh-CN" sz="3400"/>
                         <a:t>0.786</a:t>
                       </a:r>
-                      <a:endParaRPr lang="en-US" altLang="zh-CN" sz="3400"/>
                     </a:p>
                   </a:txBody>
                   <a:tcPr/>
@@ -9834,6 +9329,7 @@
                 <a:tc>
                   <a:txBody>
                     <a:bodyPr/>
+                    <a:lstStyle/>
                     <a:p>
                       <a:pPr algn="ctr">
                         <a:buNone/>
@@ -9842,7 +9338,6 @@
                         <a:rPr lang="en-US" altLang="zh-CN" sz="3400"/>
                         <a:t>0.841</a:t>
                       </a:r>
-                      <a:endParaRPr lang="en-US" altLang="zh-CN" sz="3400"/>
                     </a:p>
                   </a:txBody>
                   <a:tcPr/>
@@ -9850,6 +9345,7 @@
                 <a:tc>
                   <a:txBody>
                     <a:bodyPr/>
+                    <a:lstStyle/>
                     <a:p>
                       <a:pPr algn="ctr">
                         <a:buNone/>
@@ -9858,7 +9354,6 @@
                         <a:rPr lang="en-US" altLang="zh-CN" sz="3400"/>
                         <a:t>0.749</a:t>
                       </a:r>
-                      <a:endParaRPr lang="en-US" altLang="zh-CN" sz="3400"/>
                     </a:p>
                   </a:txBody>
                   <a:tcPr/>
@@ -9866,6 +9361,7 @@
                 <a:tc>
                   <a:txBody>
                     <a:bodyPr/>
+                    <a:lstStyle/>
                     <a:p>
                       <a:pPr algn="ctr">
                         <a:buNone/>
@@ -9874,16 +9370,21 @@
                         <a:rPr lang="en-US" altLang="zh-CN" sz="3400"/>
                         <a:t>0.638</a:t>
                       </a:r>
-                      <a:endParaRPr lang="en-US" altLang="zh-CN" sz="3400"/>
                     </a:p>
                   </a:txBody>
                   <a:tcPr/>
                 </a:tc>
+                <a:extLst>
+                  <a:ext uri="{0D108BD9-81ED-4DB2-BD59-A6C34878D82A}">
+                    <a16:rowId xmlns:a16="http://schemas.microsoft.com/office/drawing/2014/main" val="10002"/>
+                  </a:ext>
+                </a:extLst>
               </a:tr>
               <a:tr h="399415">
                 <a:tc>
                   <a:txBody>
                     <a:bodyPr/>
+                    <a:lstStyle/>
                     <a:p>
                       <a:pPr algn="ctr">
                         <a:buNone/>
@@ -9892,7 +9393,6 @@
                         <a:rPr lang="en-US" altLang="zh-CN" sz="3400"/>
                         <a:t>Random </a:t>
                       </a:r>
-                      <a:endParaRPr lang="en-US" altLang="zh-CN" sz="3400"/>
                     </a:p>
                     <a:p>
                       <a:pPr algn="ctr">
@@ -9902,7 +9402,6 @@
                         <a:rPr lang="en-US" altLang="zh-CN" sz="3400"/>
                         <a:t>Forest</a:t>
                       </a:r>
-                      <a:endParaRPr lang="en-US" altLang="zh-CN" sz="3400"/>
                     </a:p>
                   </a:txBody>
                   <a:tcPr/>
@@ -9910,6 +9409,7 @@
                 <a:tc>
                   <a:txBody>
                     <a:bodyPr/>
+                    <a:lstStyle/>
                     <a:p>
                       <a:pPr algn="ctr">
                         <a:buNone/>
@@ -9918,7 +9418,6 @@
                         <a:rPr lang="en-US" altLang="zh-CN" sz="3400"/>
                         <a:t>0.849</a:t>
                       </a:r>
-                      <a:endParaRPr lang="en-US" altLang="zh-CN" sz="3400"/>
                     </a:p>
                   </a:txBody>
                   <a:tcPr/>
@@ -9926,6 +9425,7 @@
                 <a:tc>
                   <a:txBody>
                     <a:bodyPr/>
+                    <a:lstStyle/>
                     <a:p>
                       <a:pPr algn="ctr">
                         <a:buNone/>
@@ -9934,7 +9434,6 @@
                         <a:rPr lang="en-US" altLang="zh-CN" sz="3400"/>
                         <a:t>0.936</a:t>
                       </a:r>
-                      <a:endParaRPr lang="en-US" altLang="zh-CN" sz="3400"/>
                     </a:p>
                   </a:txBody>
                   <a:tcPr/>
@@ -9942,6 +9441,7 @@
                 <a:tc>
                   <a:txBody>
                     <a:bodyPr/>
+                    <a:lstStyle/>
                     <a:p>
                       <a:pPr algn="ctr">
                         <a:buNone/>
@@ -9950,7 +9450,6 @@
                         <a:rPr lang="en-US" altLang="zh-CN" sz="3400"/>
                         <a:t>0.703</a:t>
                       </a:r>
-                      <a:endParaRPr lang="en-US" altLang="zh-CN" sz="3400"/>
                     </a:p>
                   </a:txBody>
                   <a:tcPr/>
@@ -9958,6 +9457,7 @@
                 <a:tc>
                   <a:txBody>
                     <a:bodyPr/>
+                    <a:lstStyle/>
                     <a:p>
                       <a:pPr algn="ctr">
                         <a:buNone/>
@@ -9966,7 +9466,6 @@
                         <a:rPr lang="en-US" altLang="zh-CN" sz="3400"/>
                         <a:t>0.787</a:t>
                       </a:r>
-                      <a:endParaRPr lang="en-US" altLang="zh-CN" sz="3400"/>
                     </a:p>
                   </a:txBody>
                   <a:tcPr/>
@@ -9974,6 +9473,7 @@
                 <a:tc>
                   <a:txBody>
                     <a:bodyPr/>
+                    <a:lstStyle/>
                     <a:p>
                       <a:pPr algn="ctr">
                         <a:buNone/>
@@ -9982,7 +9482,6 @@
                         <a:rPr lang="en-US" altLang="zh-CN" sz="3400"/>
                         <a:t>0.701</a:t>
                       </a:r>
-                      <a:endParaRPr lang="en-US" altLang="zh-CN" sz="3400"/>
                     </a:p>
                   </a:txBody>
                   <a:tcPr/>
@@ -9990,6 +9489,7 @@
                 <a:tc>
                   <a:txBody>
                     <a:bodyPr/>
+                    <a:lstStyle/>
                     <a:p>
                       <a:pPr algn="ctr">
                         <a:buNone/>
@@ -9998,16 +9498,21 @@
                         <a:rPr lang="en-US" altLang="zh-CN" sz="3400"/>
                         <a:t>0.529</a:t>
                       </a:r>
-                      <a:endParaRPr lang="en-US" altLang="zh-CN" sz="3400"/>
                     </a:p>
                   </a:txBody>
                   <a:tcPr/>
                 </a:tc>
+                <a:extLst>
+                  <a:ext uri="{0D108BD9-81ED-4DB2-BD59-A6C34878D82A}">
+                    <a16:rowId xmlns:a16="http://schemas.microsoft.com/office/drawing/2014/main" val="10003"/>
+                  </a:ext>
+                </a:extLst>
               </a:tr>
               <a:tr h="184150">
                 <a:tc>
                   <a:txBody>
                     <a:bodyPr/>
+                    <a:lstStyle/>
                     <a:p>
                       <a:pPr algn="ctr">
                         <a:buNone/>
@@ -10016,7 +9521,6 @@
                         <a:rPr lang="en-US" altLang="zh-CN" sz="3400"/>
                         <a:t>SVM</a:t>
                       </a:r>
-                      <a:endParaRPr lang="en-US" altLang="zh-CN" sz="3400"/>
                     </a:p>
                   </a:txBody>
                   <a:tcPr/>
@@ -10024,6 +9528,7 @@
                 <a:tc>
                   <a:txBody>
                     <a:bodyPr/>
+                    <a:lstStyle/>
                     <a:p>
                       <a:pPr algn="ctr">
                         <a:buNone/>
@@ -10032,7 +9537,6 @@
                         <a:rPr lang="en-US" altLang="zh-CN" sz="3400"/>
                         <a:t>0.897</a:t>
                       </a:r>
-                      <a:endParaRPr lang="en-US" altLang="zh-CN" sz="3400"/>
                     </a:p>
                   </a:txBody>
                   <a:tcPr/>
@@ -10040,6 +9544,7 @@
                 <a:tc>
                   <a:txBody>
                     <a:bodyPr/>
+                    <a:lstStyle/>
                     <a:p>
                       <a:pPr algn="ctr">
                         <a:buNone/>
@@ -10048,7 +9553,6 @@
                         <a:rPr lang="en-US" altLang="zh-CN" sz="3400"/>
                         <a:t>0.928</a:t>
                       </a:r>
-                      <a:endParaRPr lang="en-US" altLang="zh-CN" sz="3400"/>
                     </a:p>
                   </a:txBody>
                   <a:tcPr/>
@@ -10056,6 +9560,7 @@
                 <a:tc>
                   <a:txBody>
                     <a:bodyPr/>
+                    <a:lstStyle/>
                     <a:p>
                       <a:pPr algn="ctr">
                         <a:buNone/>
@@ -10064,7 +9569,6 @@
                         <a:rPr lang="en-US" altLang="zh-CN" sz="3400"/>
                         <a:t>0.734</a:t>
                       </a:r>
-                      <a:endParaRPr lang="en-US" altLang="zh-CN" sz="3400"/>
                     </a:p>
                   </a:txBody>
                   <a:tcPr/>
@@ -10072,6 +9576,7 @@
                 <a:tc>
                   <a:txBody>
                     <a:bodyPr/>
+                    <a:lstStyle/>
                     <a:p>
                       <a:pPr algn="ctr">
                         <a:buNone/>
@@ -10080,7 +9585,6 @@
                         <a:rPr lang="en-US" altLang="zh-CN" sz="3400"/>
                         <a:t>0.855</a:t>
                       </a:r>
-                      <a:endParaRPr lang="en-US" altLang="zh-CN" sz="3400"/>
                     </a:p>
                   </a:txBody>
                   <a:tcPr/>
@@ -10088,6 +9592,7 @@
                 <a:tc>
                   <a:txBody>
                     <a:bodyPr/>
+                    <a:lstStyle/>
                     <a:p>
                       <a:pPr algn="ctr">
                         <a:buNone/>
@@ -10096,7 +9601,6 @@
                         <a:rPr lang="en-US" altLang="zh-CN" sz="3400"/>
                         <a:t>0.676</a:t>
                       </a:r>
-                      <a:endParaRPr lang="en-US" altLang="zh-CN" sz="3400"/>
                     </a:p>
                   </a:txBody>
                   <a:tcPr/>
@@ -10104,6 +9608,7 @@
                 <a:tc>
                   <a:txBody>
                     <a:bodyPr/>
+                    <a:lstStyle/>
                     <a:p>
                       <a:pPr algn="ctr">
                         <a:buNone/>
@@ -10112,35 +9617,38 @@
                         <a:rPr lang="en-US" altLang="zh-CN" sz="3400"/>
                         <a:t>0.566</a:t>
                       </a:r>
-                      <a:endParaRPr lang="en-US" altLang="zh-CN" sz="3400"/>
                     </a:p>
                   </a:txBody>
                   <a:tcPr/>
                 </a:tc>
+                <a:extLst>
+                  <a:ext uri="{0D108BD9-81ED-4DB2-BD59-A6C34878D82A}">
+                    <a16:rowId xmlns:a16="http://schemas.microsoft.com/office/drawing/2014/main" val="10004"/>
+                  </a:ext>
+                </a:extLst>
               </a:tr>
               <a:tr h="824230">
                 <a:tc>
                   <a:txBody>
                     <a:bodyPr/>
+                    <a:lstStyle/>
                     <a:p>
                       <a:pPr algn="ctr">
                         <a:buNone/>
                       </a:pPr>
                       <a:r>
-                        <a:rPr lang="en-US" altLang="zh-CN" sz="3400"/>
-                        <a:t>Gradiant</a:t>
-                      </a:r>
-                      <a:endParaRPr lang="en-US" altLang="zh-CN" sz="3400"/>
+                        <a:rPr lang="en-US" altLang="zh-CN" sz="3400" dirty="0"/>
+                        <a:t>Gradient</a:t>
+                      </a:r>
                     </a:p>
                     <a:p>
                       <a:pPr algn="ctr">
                         <a:buNone/>
                       </a:pPr>
                       <a:r>
-                        <a:rPr lang="en-US" altLang="zh-CN" sz="3400"/>
+                        <a:rPr lang="en-US" altLang="zh-CN" sz="3400" dirty="0"/>
                         <a:t>Boosting</a:t>
                       </a:r>
-                      <a:endParaRPr lang="en-US" altLang="zh-CN" sz="3400"/>
                     </a:p>
                   </a:txBody>
                   <a:tcPr/>
@@ -10148,6 +9656,7 @@
                 <a:tc>
                   <a:txBody>
                     <a:bodyPr/>
+                    <a:lstStyle/>
                     <a:p>
                       <a:pPr algn="ctr">
                         <a:buNone/>
@@ -10156,7 +9665,6 @@
                         <a:rPr lang="en-US" altLang="zh-CN" sz="3400"/>
                         <a:t>0.920</a:t>
                       </a:r>
-                      <a:endParaRPr lang="en-US" altLang="zh-CN" sz="3400"/>
                     </a:p>
                   </a:txBody>
                   <a:tcPr/>
@@ -10164,15 +9672,15 @@
                 <a:tc>
                   <a:txBody>
                     <a:bodyPr/>
+                    <a:lstStyle/>
                     <a:p>
                       <a:pPr algn="ctr">
                         <a:buNone/>
                       </a:pPr>
                       <a:r>
-                        <a:rPr lang="en-US" altLang="zh-CN" sz="3400"/>
+                        <a:rPr lang="en-US" altLang="zh-CN" sz="3400" b="1" dirty="0"/>
                         <a:t>0.962</a:t>
                       </a:r>
-                      <a:endParaRPr lang="en-US" altLang="zh-CN" sz="3400"/>
                     </a:p>
                   </a:txBody>
                   <a:tcPr/>
@@ -10180,6 +9688,7 @@
                 <a:tc>
                   <a:txBody>
                     <a:bodyPr/>
+                    <a:lstStyle/>
                     <a:p>
                       <a:pPr algn="ctr">
                         <a:buNone/>
@@ -10188,7 +9697,6 @@
                         <a:rPr lang="en-US" altLang="zh-CN" sz="3400"/>
                         <a:t>0.818</a:t>
                       </a:r>
-                      <a:endParaRPr lang="en-US" altLang="zh-CN" sz="3400"/>
                     </a:p>
                   </a:txBody>
                   <a:tcPr/>
@@ -10196,15 +9704,15 @@
                 <a:tc>
                   <a:txBody>
                     <a:bodyPr/>
+                    <a:lstStyle/>
                     <a:p>
                       <a:pPr algn="ctr">
                         <a:buNone/>
                       </a:pPr>
                       <a:r>
-                        <a:rPr lang="en-US" altLang="zh-CN" sz="3400"/>
+                        <a:rPr lang="en-US" altLang="zh-CN" sz="3400" b="1" dirty="0"/>
                         <a:t>0.905</a:t>
                       </a:r>
-                      <a:endParaRPr lang="en-US" altLang="zh-CN" sz="3400"/>
                     </a:p>
                   </a:txBody>
                   <a:tcPr/>
@@ -10212,6 +9720,7 @@
                 <a:tc>
                   <a:txBody>
                     <a:bodyPr/>
+                    <a:lstStyle/>
                     <a:p>
                       <a:pPr algn="ctr">
                         <a:buNone/>
@@ -10220,7 +9729,6 @@
                         <a:rPr lang="en-US" altLang="zh-CN" sz="3400"/>
                         <a:t>0.762</a:t>
                       </a:r>
-                      <a:endParaRPr lang="en-US" altLang="zh-CN" sz="3400"/>
                     </a:p>
                   </a:txBody>
                   <a:tcPr/>
@@ -10228,6 +9736,7 @@
                 <a:tc>
                   <a:txBody>
                     <a:bodyPr/>
+                    <a:lstStyle/>
                     <a:p>
                       <a:pPr algn="ctr">
                         <a:buNone/>
@@ -10236,25 +9745,29 @@
                         <a:rPr lang="en-US" altLang="zh-CN" sz="3400"/>
                         <a:t>0.684</a:t>
                       </a:r>
-                      <a:endParaRPr lang="en-US" altLang="zh-CN" sz="3400"/>
                     </a:p>
                   </a:txBody>
                   <a:tcPr/>
                 </a:tc>
+                <a:extLst>
+                  <a:ext uri="{0D108BD9-81ED-4DB2-BD59-A6C34878D82A}">
+                    <a16:rowId xmlns:a16="http://schemas.microsoft.com/office/drawing/2014/main" val="10005"/>
+                  </a:ext>
+                </a:extLst>
               </a:tr>
               <a:tr h="433070">
                 <a:tc>
                   <a:txBody>
                     <a:bodyPr/>
+                    <a:lstStyle/>
                     <a:p>
                       <a:pPr algn="ctr">
                         <a:buNone/>
                       </a:pPr>
                       <a:r>
-                        <a:rPr lang="en-US" altLang="zh-CN" sz="3400"/>
+                        <a:rPr lang="en-US" altLang="zh-CN" sz="3400" dirty="0"/>
                         <a:t>KNN</a:t>
                       </a:r>
-                      <a:endParaRPr lang="en-US" altLang="zh-CN" sz="3400"/>
                     </a:p>
                   </a:txBody>
                   <a:tcPr/>
@@ -10262,15 +9775,15 @@
                 <a:tc>
                   <a:txBody>
                     <a:bodyPr/>
+                    <a:lstStyle/>
                     <a:p>
                       <a:pPr algn="ctr">
                         <a:buNone/>
                       </a:pPr>
                       <a:r>
-                        <a:rPr lang="en-US" altLang="zh-CN" sz="3400"/>
+                        <a:rPr lang="en-US" altLang="zh-CN" sz="3400" dirty="0"/>
                         <a:t>0.882</a:t>
                       </a:r>
-                      <a:endParaRPr lang="en-US" altLang="zh-CN" sz="3400"/>
                     </a:p>
                   </a:txBody>
                   <a:tcPr/>
@@ -10278,6 +9791,7 @@
                 <a:tc>
                   <a:txBody>
                     <a:bodyPr/>
+                    <a:lstStyle/>
                     <a:p>
                       <a:pPr algn="ctr">
                         <a:buNone/>
@@ -10286,7 +9800,6 @@
                         <a:rPr lang="en-US" altLang="zh-CN" sz="3400"/>
                         <a:t>0.865</a:t>
                       </a:r>
-                      <a:endParaRPr lang="en-US" altLang="zh-CN" sz="3400"/>
                     </a:p>
                   </a:txBody>
                   <a:tcPr/>
@@ -10294,15 +9807,15 @@
                 <a:tc>
                   <a:txBody>
                     <a:bodyPr/>
+                    <a:lstStyle/>
                     <a:p>
                       <a:pPr algn="ctr">
                         <a:buNone/>
                       </a:pPr>
                       <a:r>
-                        <a:rPr lang="en-US" altLang="zh-CN" sz="3400"/>
+                        <a:rPr lang="en-US" altLang="zh-CN" sz="3400" dirty="0"/>
                         <a:t>0.661</a:t>
                       </a:r>
-                      <a:endParaRPr lang="en-US" altLang="zh-CN" sz="3400"/>
                     </a:p>
                   </a:txBody>
                   <a:tcPr/>
@@ -10310,6 +9823,7 @@
                 <a:tc>
                   <a:txBody>
                     <a:bodyPr/>
+                    <a:lstStyle/>
                     <a:p>
                       <a:pPr algn="ctr">
                         <a:buNone/>
@@ -10318,7 +9832,6 @@
                         <a:rPr lang="en-US" altLang="zh-CN" sz="3400"/>
                         <a:t>0.830</a:t>
                       </a:r>
-                      <a:endParaRPr lang="en-US" altLang="zh-CN" sz="3400"/>
                     </a:p>
                   </a:txBody>
                   <a:tcPr/>
@@ -10326,6 +9839,7 @@
                 <a:tc>
                   <a:txBody>
                     <a:bodyPr/>
+                    <a:lstStyle/>
                     <a:p>
                       <a:pPr algn="ctr">
                         <a:buNone/>
@@ -10334,7 +9848,6 @@
                         <a:rPr lang="en-US" altLang="zh-CN" sz="3400"/>
                         <a:t>0.591</a:t>
                       </a:r>
-                      <a:endParaRPr lang="en-US" altLang="zh-CN" sz="3400"/>
                     </a:p>
                   </a:txBody>
                   <a:tcPr/>
@@ -10342,19 +9855,24 @@
                 <a:tc>
                   <a:txBody>
                     <a:bodyPr/>
+                    <a:lstStyle/>
                     <a:p>
                       <a:pPr algn="ctr">
                         <a:buNone/>
                       </a:pPr>
                       <a:r>
-                        <a:rPr lang="en-US" altLang="zh-CN" sz="3400"/>
+                        <a:rPr lang="en-US" altLang="zh-CN" sz="3400" dirty="0"/>
                         <a:t>0.504</a:t>
                       </a:r>
-                      <a:endParaRPr lang="en-US" altLang="zh-CN" sz="3400"/>
                     </a:p>
                   </a:txBody>
                   <a:tcPr/>
                 </a:tc>
+                <a:extLst>
+                  <a:ext uri="{0D108BD9-81ED-4DB2-BD59-A6C34878D82A}">
+                    <a16:rowId xmlns:a16="http://schemas.microsoft.com/office/drawing/2014/main" val="10006"/>
+                  </a:ext>
+                </a:extLst>
               </a:tr>
             </a:tbl>
           </a:graphicData>
@@ -10380,66 +9898,100 @@
           <a:bodyPr wrap="square" rtlCol="0">
             <a:spAutoFit/>
           </a:bodyPr>
+          <a:lstStyle/>
           <a:p>
             <a:r>
               <a:rPr lang="en-US" altLang="zh-CN"/>
               <a:t>.</a:t>
             </a:r>
             <a:endParaRPr lang="zh-CN" altLang="en-US"/>
+          </a:p>
+        </p:txBody>
+      </p:sp>
+      <p:sp>
+        <p:nvSpPr>
+          <p:cNvPr id="36" name="文本框 35"/>
+          <p:cNvSpPr txBox="1"/>
+          <p:nvPr/>
+        </p:nvSpPr>
+        <p:spPr>
+          <a:xfrm>
+            <a:off x="20818180" y="26880214"/>
+            <a:ext cx="11966870" cy="5632311"/>
+          </a:xfrm>
+          <a:prstGeom prst="rect">
+            <a:avLst/>
+          </a:prstGeom>
+          <a:noFill/>
+        </p:spPr>
+        <p:txBody>
+          <a:bodyPr wrap="square" rtlCol="0">
+            <a:spAutoFit/>
+          </a:bodyPr>
+          <a:lstStyle/>
+          <a:p>
+            <a:pPr marL="457200" indent="-457200">
+              <a:buFont typeface="Arial" panose="020B0604020202090204" pitchFamily="34" charset="0"/>
+              <a:buChar char="•"/>
+            </a:pPr>
+            <a:r>
+              <a:rPr lang="en-US" altLang="zh-CN" sz="3000" dirty="0">
+                <a:latin typeface="Times New Roman" panose="02020503050405090304" charset="0"/>
+                <a:cs typeface="Times New Roman" panose="02020503050405090304" charset="0"/>
+              </a:rPr>
+              <a:t>The Tabular Transformer achieved the strongest overall performance (Accuracy = 0.923, AUC = 0.957, F1 = 0.829) which outperformed all five traditional ML models in three-class classification.</a:t>
+            </a:r>
+          </a:p>
+          <a:p>
+            <a:pPr marL="457200" indent="-457200">
+              <a:buFont typeface="Arial" panose="020B0604020202090204" pitchFamily="34" charset="0"/>
+              <a:buChar char="•"/>
+            </a:pPr>
+            <a:r>
+              <a:rPr lang="en-US" altLang="zh-CN" sz="3000" dirty="0">
+                <a:latin typeface="Times New Roman" panose="02020503050405090304" charset="0"/>
+                <a:cs typeface="Times New Roman" panose="02020503050405090304" charset="0"/>
+              </a:rPr>
+              <a:t>PD-plus remained the most challenging class to classify across all models, driven by severe class imbalance (4.6% of sample) and clinical overlap with PD.</a:t>
+            </a:r>
+          </a:p>
+          <a:p>
+            <a:pPr marL="457200" indent="-457200">
+              <a:buFont typeface="Arial" panose="020B0604020202090204" pitchFamily="34" charset="0"/>
+              <a:buChar char="•"/>
+            </a:pPr>
+            <a:r>
+              <a:rPr lang="en-US" altLang="zh-CN" sz="3000" dirty="0">
+                <a:latin typeface="Times New Roman" panose="02020503050405090304" charset="0"/>
+                <a:cs typeface="Times New Roman" panose="02020503050405090304" charset="0"/>
+              </a:rPr>
+              <a:t>SHAP analysis revealed distinct predictor profiles: cognitive features (MoCA Attention) and non-motor symptoms dominate AP classification, while gastrointestinal and sleep-related features are more predictive of PD.</a:t>
+            </a:r>
+          </a:p>
+          <a:p>
+            <a:pPr marL="457200" indent="-457200">
+              <a:buFont typeface="Arial" panose="020B0604020202090204" pitchFamily="34" charset="0"/>
+              <a:buChar char="•"/>
+            </a:pPr>
+            <a:r>
+              <a:rPr lang="en-US" altLang="zh-CN" sz="3000" dirty="0">
+                <a:latin typeface="Times New Roman" panose="02020503050405090304" charset="0"/>
+                <a:cs typeface="Times New Roman" panose="02020503050405090304" charset="0"/>
+              </a:rPr>
+              <a:t>Future work should incorporate larger PD-plus cohorts and external site-based validation to improve generalizability of the classification model.</a:t>
+            </a:r>
           </a:p>
         </p:txBody>
       </p:sp>
       <p:pic>
         <p:nvPicPr>
-          <p:cNvPr id="29" name="图片 28" descr="截屏2026-04-12 19.34.43"/>
-          <p:cNvPicPr>
-            <a:picLocks noChangeAspect="1"/>
-          </p:cNvPicPr>
-          <p:nvPr/>
-        </p:nvPicPr>
-        <p:blipFill>
-          <a:blip r:embed="rId2"/>
-          <a:stretch>
-            <a:fillRect/>
-          </a:stretch>
-        </p:blipFill>
-        <p:spPr>
-          <a:xfrm>
-            <a:off x="8358505" y="25003760"/>
-            <a:ext cx="13178790" cy="7722870"/>
-          </a:xfrm>
-          <a:prstGeom prst="rect">
-            <a:avLst/>
-          </a:prstGeom>
-        </p:spPr>
-      </p:pic>
-      <p:pic>
-        <p:nvPicPr>
-          <p:cNvPr id="30" name="图片 29" descr="截屏2026-04-12 20.16.47"/>
-          <p:cNvPicPr>
-            <a:picLocks noChangeAspect="1"/>
-          </p:cNvPicPr>
-          <p:nvPr/>
-        </p:nvPicPr>
-        <p:blipFill>
-          <a:blip r:embed="rId3"/>
-          <a:stretch>
-            <a:fillRect/>
-          </a:stretch>
-        </p:blipFill>
-        <p:spPr>
-          <a:xfrm>
-            <a:off x="20770850" y="9815195"/>
-            <a:ext cx="12051030" cy="6959600"/>
-          </a:xfrm>
-          <a:prstGeom prst="rect">
-            <a:avLst/>
-          </a:prstGeom>
-        </p:spPr>
-      </p:pic>
-      <p:pic>
-        <p:nvPicPr>
-          <p:cNvPr id="31" name="图片 30" descr="截屏2026-04-12 20.17.19"/>
+          <p:cNvPr id="9" name="Picture 8">
+            <a:extLst>
+              <a:ext uri="{FF2B5EF4-FFF2-40B4-BE49-F238E27FC236}">
+                <a16:creationId xmlns:a16="http://schemas.microsoft.com/office/drawing/2014/main" id="{B48399D7-5C3E-6AFC-142C-D38199AC598A}"/>
+              </a:ext>
+            </a:extLst>
+          </p:cNvPr>
           <p:cNvPicPr>
             <a:picLocks noChangeAspect="1"/>
           </p:cNvPicPr>
@@ -10453,8 +10005,68 @@
         </p:blipFill>
         <p:spPr>
           <a:xfrm>
-            <a:off x="20775295" y="16980535"/>
-            <a:ext cx="11800840" cy="7086600"/>
+            <a:off x="8633401" y="24960453"/>
+            <a:ext cx="11859321" cy="7985516"/>
+          </a:xfrm>
+          <a:prstGeom prst="rect">
+            <a:avLst/>
+          </a:prstGeom>
+        </p:spPr>
+      </p:pic>
+      <p:pic>
+        <p:nvPicPr>
+          <p:cNvPr id="11" name="Picture 10" descr="A graph with red and blue dots&#10;&#10;AI-generated content may be incorrect.">
+            <a:extLst>
+              <a:ext uri="{FF2B5EF4-FFF2-40B4-BE49-F238E27FC236}">
+                <a16:creationId xmlns:a16="http://schemas.microsoft.com/office/drawing/2014/main" id="{310B429E-020C-6C3E-A15A-4A9EA9831D92}"/>
+              </a:ext>
+            </a:extLst>
+          </p:cNvPr>
+          <p:cNvPicPr>
+            <a:picLocks noChangeAspect="1"/>
+          </p:cNvPicPr>
+          <p:nvPr/>
+        </p:nvPicPr>
+        <p:blipFill>
+          <a:blip r:embed="rId5"/>
+          <a:stretch>
+            <a:fillRect/>
+          </a:stretch>
+        </p:blipFill>
+        <p:spPr>
+          <a:xfrm>
+            <a:off x="20735500" y="8927955"/>
+            <a:ext cx="11966870" cy="8437415"/>
+          </a:xfrm>
+          <a:prstGeom prst="rect">
+            <a:avLst/>
+          </a:prstGeom>
+        </p:spPr>
+      </p:pic>
+      <p:pic>
+        <p:nvPicPr>
+          <p:cNvPr id="14" name="Picture 13" descr="A graph with red and blue dots&#10;&#10;AI-generated content may be incorrect.">
+            <a:extLst>
+              <a:ext uri="{FF2B5EF4-FFF2-40B4-BE49-F238E27FC236}">
+                <a16:creationId xmlns:a16="http://schemas.microsoft.com/office/drawing/2014/main" id="{1098DD76-A187-CCCF-F08D-F604F7875B38}"/>
+              </a:ext>
+            </a:extLst>
+          </p:cNvPr>
+          <p:cNvPicPr>
+            <a:picLocks noChangeAspect="1"/>
+          </p:cNvPicPr>
+          <p:nvPr/>
+        </p:nvPicPr>
+        <p:blipFill>
+          <a:blip r:embed="rId6"/>
+          <a:stretch>
+            <a:fillRect/>
+          </a:stretch>
+        </p:blipFill>
+        <p:spPr>
+          <a:xfrm>
+            <a:off x="21032436" y="17573422"/>
+            <a:ext cx="11642089" cy="8172515"/>
           </a:xfrm>
           <a:prstGeom prst="rect">
             <a:avLst/>
@@ -10463,14 +10075,110 @@
       </p:pic>
       <p:sp>
         <p:nvSpPr>
-          <p:cNvPr id="32" name="文本框 31"/>
+          <p:cNvPr id="15" name="TextBox 14">
+            <a:extLst>
+              <a:ext uri="{FF2B5EF4-FFF2-40B4-BE49-F238E27FC236}">
+                <a16:creationId xmlns:a16="http://schemas.microsoft.com/office/drawing/2014/main" id="{1EABA380-5F70-3BEA-0108-9AA4EF4A0EF3}"/>
+              </a:ext>
+            </a:extLst>
+          </p:cNvPr>
           <p:cNvSpPr txBox="1"/>
           <p:nvPr/>
         </p:nvSpPr>
         <p:spPr>
           <a:xfrm>
-            <a:off x="20867370" y="5377180"/>
-            <a:ext cx="5807710" cy="3784600"/>
+            <a:off x="23602967" y="8462193"/>
+            <a:ext cx="17613482" cy="707886"/>
+          </a:xfrm>
+          <a:prstGeom prst="rect">
+            <a:avLst/>
+          </a:prstGeom>
+          <a:noFill/>
+        </p:spPr>
+        <p:txBody>
+          <a:bodyPr wrap="square">
+            <a:spAutoFit/>
+          </a:bodyPr>
+          <a:lstStyle/>
+          <a:p>
+            <a:r>
+              <a:rPr lang="en-US" sz="4000" b="1" spc="-112" dirty="0" err="1">
+                <a:latin typeface="Times New Roman" panose="02020603050405020304" pitchFamily="18" charset="0"/>
+                <a:cs typeface="Times New Roman" panose="02020603050405020304" pitchFamily="18" charset="0"/>
+              </a:rPr>
+              <a:t>Beeswarm</a:t>
+            </a:r>
+            <a:r>
+              <a:rPr lang="en-US" sz="4000" b="1" spc="-112" dirty="0">
+                <a:latin typeface="Times New Roman" panose="02020603050405020304" pitchFamily="18" charset="0"/>
+                <a:cs typeface="Times New Roman" panose="02020603050405020304" pitchFamily="18" charset="0"/>
+              </a:rPr>
+              <a:t> Plot for PD-Plus</a:t>
+            </a:r>
+          </a:p>
+        </p:txBody>
+      </p:sp>
+      <p:sp>
+        <p:nvSpPr>
+          <p:cNvPr id="16" name="TextBox 15">
+            <a:extLst>
+              <a:ext uri="{FF2B5EF4-FFF2-40B4-BE49-F238E27FC236}">
+                <a16:creationId xmlns:a16="http://schemas.microsoft.com/office/drawing/2014/main" id="{ECACBBFA-0345-75C9-3628-95869DFB18CE}"/>
+              </a:ext>
+            </a:extLst>
+          </p:cNvPr>
+          <p:cNvSpPr txBox="1"/>
+          <p:nvPr/>
+        </p:nvSpPr>
+        <p:spPr>
+          <a:xfrm>
+            <a:off x="23602967" y="17232742"/>
+            <a:ext cx="17613482" cy="707886"/>
+          </a:xfrm>
+          <a:prstGeom prst="rect">
+            <a:avLst/>
+          </a:prstGeom>
+          <a:noFill/>
+        </p:spPr>
+        <p:txBody>
+          <a:bodyPr wrap="square">
+            <a:spAutoFit/>
+          </a:bodyPr>
+          <a:lstStyle/>
+          <a:p>
+            <a:r>
+              <a:rPr lang="en-US" sz="4000" b="1" spc="-112" dirty="0" err="1">
+                <a:latin typeface="Times New Roman" panose="02020603050405020304" pitchFamily="18" charset="0"/>
+                <a:cs typeface="Times New Roman" panose="02020603050405020304" pitchFamily="18" charset="0"/>
+              </a:rPr>
+              <a:t>Beeswarm</a:t>
+            </a:r>
+            <a:r>
+              <a:rPr lang="en-US" sz="4000" b="1" spc="-112" dirty="0">
+                <a:latin typeface="Times New Roman" panose="02020603050405020304" pitchFamily="18" charset="0"/>
+                <a:cs typeface="Times New Roman" panose="02020603050405020304" pitchFamily="18" charset="0"/>
+              </a:rPr>
+              <a:t> Plot for PD</a:t>
+            </a:r>
+          </a:p>
+        </p:txBody>
+      </p:sp>
+      <p:sp>
+        <p:nvSpPr>
+          <p:cNvPr id="17" name="TextBox 16">
+            <a:extLst>
+              <a:ext uri="{FF2B5EF4-FFF2-40B4-BE49-F238E27FC236}">
+                <a16:creationId xmlns:a16="http://schemas.microsoft.com/office/drawing/2014/main" id="{03A85AFC-A1F4-73F8-B4E1-7B4834169359}"/>
+              </a:ext>
+            </a:extLst>
+          </p:cNvPr>
+          <p:cNvSpPr txBox="1"/>
+          <p:nvPr/>
+        </p:nvSpPr>
+        <p:spPr>
+          <a:xfrm>
+            <a:off x="21123275" y="5403382"/>
+            <a:ext cx="11680723" cy="3323987"/>
           </a:xfrm>
           <a:prstGeom prst="rect">
             <a:avLst/>
@@ -10481,324 +10189,39 @@
           <a:bodyPr wrap="square" rtlCol="0">
             <a:spAutoFit/>
           </a:bodyPr>
-          <a:p>
-            <a:r>
-              <a:rPr lang="en-US" altLang="zh-CN" sz="4000">
+          <a:lstStyle/>
+          <a:p>
+            <a:pPr marL="457200" indent="-457200">
+              <a:buFont typeface="Arial" panose="020B0604020202020204" pitchFamily="34" charset="0"/>
+              <a:buChar char="•"/>
+            </a:pPr>
+            <a:r>
+              <a:rPr lang="en-US" sz="3200" dirty="0">
                 <a:latin typeface="Times New Roman" panose="02020503050405090304" charset="0"/>
                 <a:cs typeface="Times New Roman" panose="02020503050405090304" charset="0"/>
               </a:rPr>
-              <a:t>AP (Atypical Parkinsonism)</a:t>
-            </a:r>
-            <a:endParaRPr lang="en-US" altLang="zh-CN" sz="4000">
-              <a:latin typeface="Times New Roman" panose="02020503050405090304" charset="0"/>
-              <a:cs typeface="Times New Roman" panose="02020503050405090304" charset="0"/>
-            </a:endParaRPr>
-          </a:p>
-          <a:p>
-            <a:pPr indent="0">
-              <a:buNone/>
+              <a:t>SHAP quantifies each feature's contribution to a prediction by computing its marginal impact relative to a baseline expected output. </a:t>
+            </a:r>
+          </a:p>
+          <a:p>
+            <a:pPr marL="457200" indent="-457200">
+              <a:buFont typeface="Arial" panose="020B0604020202020204" pitchFamily="34" charset="0"/>
+              <a:buChar char="•"/>
             </a:pPr>
             <a:r>
-              <a:rPr lang="en-US" altLang="zh-CN" sz="4000">
+              <a:rPr lang="en-US" sz="3200" dirty="0">
                 <a:latin typeface="Times New Roman" panose="02020503050405090304" charset="0"/>
                 <a:cs typeface="Times New Roman" panose="02020503050405090304" charset="0"/>
               </a:rPr>
-              <a:t>1. MoCA Attention</a:t>
-            </a:r>
-            <a:endParaRPr lang="en-US" altLang="zh-CN" sz="4000">
-              <a:latin typeface="Times New Roman" panose="02020503050405090304" charset="0"/>
-              <a:cs typeface="Times New Roman" panose="02020503050405090304" charset="0"/>
-            </a:endParaRPr>
-          </a:p>
-          <a:p>
-            <a:r>
-              <a:rPr lang="en-US" altLang="zh-CN" sz="4000">
-                <a:latin typeface="Times New Roman" panose="02020503050405090304" charset="0"/>
-                <a:cs typeface="Times New Roman" panose="02020503050405090304" charset="0"/>
-              </a:rPr>
-              <a:t>2. Restless Legs</a:t>
-            </a:r>
-            <a:endParaRPr lang="en-US" altLang="zh-CN" sz="4000">
-              <a:latin typeface="Times New Roman" panose="02020503050405090304" charset="0"/>
-              <a:cs typeface="Times New Roman" panose="02020503050405090304" charset="0"/>
-            </a:endParaRPr>
-          </a:p>
-          <a:p>
-            <a:r>
-              <a:rPr lang="en-US" altLang="zh-CN" sz="4000">
-                <a:latin typeface="Times New Roman" panose="02020503050405090304" charset="0"/>
-                <a:cs typeface="Times New Roman" panose="02020503050405090304" charset="0"/>
-              </a:rPr>
-              <a:t>3. Pesticide Exposure</a:t>
-            </a:r>
-            <a:endParaRPr lang="en-US" altLang="zh-CN" sz="4000">
-              <a:latin typeface="Times New Roman" panose="02020503050405090304" charset="0"/>
-              <a:cs typeface="Times New Roman" panose="02020503050405090304" charset="0"/>
-            </a:endParaRPr>
-          </a:p>
-          <a:p>
-            <a:r>
-              <a:rPr lang="en-US" altLang="zh-CN" sz="4000">
-                <a:latin typeface="Times New Roman" panose="02020503050405090304" charset="0"/>
-                <a:cs typeface="Times New Roman" panose="02020503050405090304" charset="0"/>
-              </a:rPr>
-              <a:t>4. Dyskinesia</a:t>
-            </a:r>
-            <a:endParaRPr lang="en-US" altLang="zh-CN" sz="4000">
-              <a:latin typeface="Times New Roman" panose="02020503050405090304" charset="0"/>
-              <a:cs typeface="Times New Roman" panose="02020503050405090304" charset="0"/>
-            </a:endParaRPr>
-          </a:p>
-          <a:p>
-            <a:r>
-              <a:rPr lang="en-US" altLang="zh-CN" sz="4000">
-                <a:latin typeface="Times New Roman" panose="02020503050405090304" charset="0"/>
-                <a:cs typeface="Times New Roman" panose="02020503050405090304" charset="0"/>
-              </a:rPr>
-              <a:t>5. MoCA Abstraction</a:t>
-            </a:r>
-            <a:endParaRPr lang="en-US" altLang="zh-CN" sz="4000">
-              <a:latin typeface="Times New Roman" panose="02020503050405090304" charset="0"/>
-              <a:cs typeface="Times New Roman" panose="02020503050405090304" charset="0"/>
-            </a:endParaRPr>
-          </a:p>
-        </p:txBody>
-      </p:sp>
-      <p:sp>
-        <p:nvSpPr>
-          <p:cNvPr id="34" name="文本框 33"/>
-          <p:cNvSpPr txBox="1"/>
-          <p:nvPr/>
-        </p:nvSpPr>
-        <p:spPr>
-          <a:xfrm>
-            <a:off x="26675080" y="5377180"/>
-            <a:ext cx="6092825" cy="3784600"/>
-          </a:xfrm>
-          <a:prstGeom prst="rect">
-            <a:avLst/>
-          </a:prstGeom>
-          <a:noFill/>
-        </p:spPr>
-        <p:txBody>
-          <a:bodyPr wrap="square" rtlCol="0">
-            <a:spAutoFit/>
-          </a:bodyPr>
-          <a:p>
-            <a:r>
-              <a:rPr lang="en-US" altLang="zh-CN" sz="4000">
-                <a:latin typeface="Times New Roman" panose="02020503050405090304" charset="0"/>
-                <a:cs typeface="Times New Roman" panose="02020503050405090304" charset="0"/>
-              </a:rPr>
-              <a:t>PD (Parkinson's Disease)</a:t>
-            </a:r>
-            <a:endParaRPr lang="en-US" altLang="zh-CN" sz="4000">
-              <a:latin typeface="Times New Roman" panose="02020503050405090304" charset="0"/>
-              <a:cs typeface="Times New Roman" panose="02020503050405090304" charset="0"/>
-            </a:endParaRPr>
-          </a:p>
-          <a:p>
-            <a:r>
-              <a:rPr lang="en-US" altLang="zh-CN" sz="4000">
-                <a:latin typeface="Times New Roman" panose="02020503050405090304" charset="0"/>
-                <a:cs typeface="Times New Roman" panose="02020503050405090304" charset="0"/>
-              </a:rPr>
-              <a:t>1. Restless Legs</a:t>
-            </a:r>
-            <a:endParaRPr lang="en-US" altLang="zh-CN" sz="4000">
-              <a:latin typeface="Times New Roman" panose="02020503050405090304" charset="0"/>
-              <a:cs typeface="Times New Roman" panose="02020503050405090304" charset="0"/>
-            </a:endParaRPr>
-          </a:p>
-          <a:p>
-            <a:r>
-              <a:rPr lang="en-US" altLang="zh-CN" sz="4000">
-                <a:latin typeface="Times New Roman" panose="02020503050405090304" charset="0"/>
-                <a:cs typeface="Times New Roman" panose="02020503050405090304" charset="0"/>
-              </a:rPr>
-              <a:t>2. Marital Status</a:t>
-            </a:r>
-            <a:endParaRPr lang="en-US" altLang="zh-CN" sz="4000">
-              <a:latin typeface="Times New Roman" panose="02020503050405090304" charset="0"/>
-              <a:cs typeface="Times New Roman" panose="02020503050405090304" charset="0"/>
-            </a:endParaRPr>
-          </a:p>
-          <a:p>
-            <a:r>
-              <a:rPr lang="en-US" altLang="zh-CN" sz="4000">
-                <a:latin typeface="Times New Roman" panose="02020503050405090304" charset="0"/>
-                <a:cs typeface="Times New Roman" panose="02020503050405090304" charset="0"/>
-              </a:rPr>
-              <a:t>3. Constipation</a:t>
-            </a:r>
-            <a:endParaRPr lang="en-US" altLang="zh-CN" sz="4000">
-              <a:latin typeface="Times New Roman" panose="02020503050405090304" charset="0"/>
-              <a:cs typeface="Times New Roman" panose="02020503050405090304" charset="0"/>
-            </a:endParaRPr>
-          </a:p>
-          <a:p>
-            <a:r>
-              <a:rPr lang="en-US" altLang="zh-CN" sz="4000">
-                <a:latin typeface="Times New Roman" panose="02020503050405090304" charset="0"/>
-                <a:cs typeface="Times New Roman" panose="02020503050405090304" charset="0"/>
-              </a:rPr>
-              <a:t>4. Hoehn &amp; Yahr Stage†</a:t>
-            </a:r>
-            <a:endParaRPr lang="en-US" altLang="zh-CN" sz="4000">
-              <a:latin typeface="Times New Roman" panose="02020503050405090304" charset="0"/>
-              <a:cs typeface="Times New Roman" panose="02020503050405090304" charset="0"/>
-            </a:endParaRPr>
-          </a:p>
-          <a:p>
-            <a:r>
-              <a:rPr lang="en-US" altLang="zh-CN" sz="4000">
-                <a:latin typeface="Times New Roman" panose="02020503050405090304" charset="0"/>
-                <a:cs typeface="Times New Roman" panose="02020503050405090304" charset="0"/>
-              </a:rPr>
-              <a:t>5. MoCA Attention</a:t>
-            </a:r>
-            <a:endParaRPr lang="en-US" altLang="zh-CN" sz="4000">
-              <a:latin typeface="Times New Roman" panose="02020503050405090304" charset="0"/>
-              <a:cs typeface="Times New Roman" panose="02020503050405090304" charset="0"/>
-            </a:endParaRPr>
-          </a:p>
-        </p:txBody>
-      </p:sp>
-      <p:sp>
-        <p:nvSpPr>
-          <p:cNvPr id="35" name="文本框 34"/>
-          <p:cNvSpPr txBox="1"/>
-          <p:nvPr/>
-        </p:nvSpPr>
-        <p:spPr>
-          <a:xfrm>
-            <a:off x="20876895" y="9000490"/>
-            <a:ext cx="10908030" cy="706755"/>
-          </a:xfrm>
-          <a:prstGeom prst="rect">
-            <a:avLst/>
-          </a:prstGeom>
-          <a:noFill/>
-        </p:spPr>
-        <p:txBody>
-          <a:bodyPr wrap="square" rtlCol="0">
-            <a:spAutoFit/>
-          </a:bodyPr>
-          <a:p>
-            <a:r>
-              <a:rPr lang="en-US" altLang="zh-CN" sz="4000">
-                <a:solidFill>
-                  <a:schemeClr val="tx2"/>
-                </a:solidFill>
-                <a:latin typeface="Times New Roman" panose="02020503050405090304" charset="0"/>
-                <a:cs typeface="Times New Roman" panose="02020503050405090304" charset="0"/>
-              </a:rPr>
-              <a:t>AP &amp; TP Top Predictors</a:t>
-            </a:r>
-            <a:endParaRPr lang="en-US" altLang="zh-CN" sz="4000">
-              <a:solidFill>
-                <a:schemeClr val="tx2"/>
-              </a:solidFill>
-              <a:latin typeface="Times New Roman" panose="02020503050405090304" charset="0"/>
-              <a:cs typeface="Times New Roman" panose="02020503050405090304" charset="0"/>
-            </a:endParaRPr>
-          </a:p>
-        </p:txBody>
-      </p:sp>
-      <p:sp>
-        <p:nvSpPr>
-          <p:cNvPr id="36" name="文本框 35"/>
-          <p:cNvSpPr txBox="1"/>
-          <p:nvPr/>
-        </p:nvSpPr>
-        <p:spPr>
-          <a:xfrm>
-            <a:off x="21724620" y="24747855"/>
-            <a:ext cx="11097260" cy="8170545"/>
-          </a:xfrm>
-          <a:prstGeom prst="rect">
-            <a:avLst/>
-          </a:prstGeom>
-          <a:noFill/>
-        </p:spPr>
-        <p:txBody>
-          <a:bodyPr wrap="square" rtlCol="0">
-            <a:spAutoFit/>
-          </a:bodyPr>
-          <a:p>
-            <a:pPr marL="457200" indent="-457200">
-              <a:buFont typeface="Arial" panose="020B0604020202090204" pitchFamily="34" charset="0"/>
+              <a:t>Hoehn &amp; Yahr Stage, Restless Legs, and MoCA Attention were the most influential discriminators, with motor severity and non-motor symptoms driving class separation.</a:t>
+            </a:r>
+          </a:p>
+          <a:p>
+            <a:pPr marL="285750" indent="-285750">
+              <a:buFont typeface="Arial" panose="020B0604020202020204" pitchFamily="34" charset="0"/>
               <a:buChar char="•"/>
             </a:pPr>
-            <a:r>
-              <a:rPr lang="en-US" altLang="zh-CN" sz="3500">
-                <a:latin typeface="Times New Roman" panose="02020503050405090304" charset="0"/>
-                <a:cs typeface="Times New Roman" panose="02020503050405090304" charset="0"/>
-              </a:rPr>
-              <a:t>The Tabular Transformer achieved the strongest overall performance (Accuracy = 0.923, AUC = 0.957, F1 = 0.829) </a:t>
-            </a:r>
-            <a:r>
-              <a:rPr lang="en-US" altLang="zh-CN" sz="3500">
-                <a:latin typeface="Times New Roman" panose="02020503050405090304" charset="0"/>
-                <a:cs typeface="Times New Roman" panose="02020503050405090304" charset="0"/>
-              </a:rPr>
-              <a:t>which outperformed all five traditional ML models in three-class classification.</a:t>
-            </a:r>
-            <a:endParaRPr lang="en-US" altLang="zh-CN" sz="3500">
-              <a:latin typeface="Times New Roman" panose="02020503050405090304" charset="0"/>
-              <a:cs typeface="Times New Roman" panose="02020503050405090304" charset="0"/>
-            </a:endParaRPr>
-          </a:p>
-          <a:p>
-            <a:pPr marL="457200" indent="-457200">
-              <a:buFont typeface="Arial" panose="020B0604020202090204" pitchFamily="34" charset="0"/>
-              <a:buChar char="•"/>
-            </a:pPr>
-            <a:r>
-              <a:rPr lang="en-US" altLang="zh-CN" sz="3500">
-                <a:latin typeface="Times New Roman" panose="02020503050405090304" charset="0"/>
-                <a:cs typeface="Times New Roman" panose="02020503050405090304" charset="0"/>
-              </a:rPr>
-              <a:t>PD-plus remained the most challenging class to classify across all models, driven by severe class imbalance (4.6% of sample) and clinical overlap with PD.</a:t>
-            </a:r>
-            <a:endParaRPr lang="en-US" altLang="zh-CN" sz="3500">
-              <a:latin typeface="Times New Roman" panose="02020503050405090304" charset="0"/>
-              <a:cs typeface="Times New Roman" panose="02020503050405090304" charset="0"/>
-            </a:endParaRPr>
-          </a:p>
-          <a:p>
-            <a:pPr marL="457200" indent="-457200">
-              <a:buFont typeface="Arial" panose="020B0604020202090204" pitchFamily="34" charset="0"/>
-              <a:buChar char="•"/>
-            </a:pPr>
-            <a:r>
-              <a:rPr lang="en-US" altLang="zh-CN" sz="3500">
-                <a:latin typeface="Times New Roman" panose="02020503050405090304" charset="0"/>
-                <a:cs typeface="Times New Roman" panose="02020503050405090304" charset="0"/>
-              </a:rPr>
-              <a:t>SHAP analysis revealed distinct predictor profiles: cognitive features (MoCA Attention) and non-motor symptoms dominate AP classification, while gastrointestinal and sleep-related features are more predictive of PD.</a:t>
-            </a:r>
-            <a:endParaRPr lang="en-US" altLang="zh-CN" sz="3500">
-              <a:latin typeface="Times New Roman" panose="02020503050405090304" charset="0"/>
-              <a:cs typeface="Times New Roman" panose="02020503050405090304" charset="0"/>
-            </a:endParaRPr>
-          </a:p>
-          <a:p>
-            <a:pPr marL="457200" indent="-457200">
-              <a:buFont typeface="Arial" panose="020B0604020202090204" pitchFamily="34" charset="0"/>
-              <a:buChar char="•"/>
-            </a:pPr>
-            <a:r>
-              <a:rPr lang="en-US" altLang="zh-CN" sz="3500">
-                <a:latin typeface="Times New Roman" panose="02020503050405090304" charset="0"/>
-                <a:cs typeface="Times New Roman" panose="02020503050405090304" charset="0"/>
-              </a:rPr>
-              <a:t>Future work should incorporate larger PD-plus cohorts and external site-based validation to improve generalizability of the classification model.</a:t>
-            </a:r>
-            <a:endParaRPr lang="en-US" altLang="zh-CN" sz="3500">
-              <a:latin typeface="Times New Roman" panose="02020503050405090304" charset="0"/>
-              <a:cs typeface="Times New Roman" panose="02020503050405090304" charset="0"/>
-            </a:endParaRPr>
+            <a:endParaRPr lang="en-US" dirty="0"/>
           </a:p>
         </p:txBody>
       </p:sp>
@@ -11082,6 +10505,7 @@
       </a:style>
     </a:lnDef>
   </a:objectDefaults>
+  <a:extraClrSchemeLst/>
   <a:extLst>
     <a:ext uri="{05A4C25C-085E-4340-85A3-A5531E510DB2}">
       <thm15:themeFamily xmlns:thm15="http://schemas.microsoft.com/office/thememl/2012/main" name="Office Theme" id="{62F939B6-93AF-4DB8-9C6B-D6C7DFDC589F}" vid="{4A3C46E8-61CC-4603-A589-7422A47A8E4A}"/>
@@ -11341,6 +10765,8 @@
       </a:bgFillStyleLst>
     </a:fmtScheme>
   </a:themeElements>
+  <a:objectDefaults/>
+  <a:extraClrSchemeLst/>
   <a:extLst>
     <a:ext uri="{05A4C25C-085E-4340-85A3-A5531E510DB2}">
       <thm15:themeFamily xmlns:thm15="http://schemas.microsoft.com/office/thememl/2012/main" name="Office Theme" id="{62F939B6-93AF-4DB8-9C6B-D6C7DFDC589F}" vid="{4A3C46E8-61CC-4603-A589-7422A47A8E4A}"/>
